--- a/docs/ativo/material_qualificacao_2026-09-30.pptx
+++ b/docs/ativo/material_qualificacao_2026-09-30.pptx
@@ -3360,7 +3360,7 @@
               </a:spcAft>
             </a:pPr>
             <a:r>
-              <a:rPr sz="1400" b="1">
+              <a:rPr sz="1600" b="1">
                 <a:solidFill>
                   <a:srgbClr val="1F2A4E"/>
                 </a:solidFill>
@@ -3368,7 +3368,7 @@
               <a:t>Mestrando:  </a:t>
             </a:r>
             <a:r>
-              <a:rPr sz="1400">
+              <a:rPr sz="1600">
                 <a:solidFill>
                   <a:srgbClr val="3D424E"/>
                 </a:solidFill>
@@ -3383,7 +3383,7 @@
               </a:spcAft>
             </a:pPr>
             <a:r>
-              <a:rPr sz="1400" b="1">
+              <a:rPr sz="1600" b="1">
                 <a:solidFill>
                   <a:srgbClr val="1F2A4E"/>
                 </a:solidFill>
@@ -3391,7 +3391,7 @@
               <a:t>Orientador:  </a:t>
             </a:r>
             <a:r>
-              <a:rPr sz="1400">
+              <a:rPr sz="1600">
                 <a:solidFill>
                   <a:srgbClr val="3D424E"/>
                 </a:solidFill>
@@ -3406,7 +3406,7 @@
               </a:spcAft>
             </a:pPr>
             <a:r>
-              <a:rPr sz="1400" b="1">
+              <a:rPr sz="1600" b="1">
                 <a:solidFill>
                   <a:srgbClr val="1F2A4E"/>
                 </a:solidFill>
@@ -3414,7 +3414,7 @@
               <a:t>Programa:  </a:t>
             </a:r>
             <a:r>
-              <a:rPr sz="1400">
+              <a:rPr sz="1600">
                 <a:solidFill>
                   <a:srgbClr val="3D424E"/>
                 </a:solidFill>
@@ -3429,7 +3429,7 @@
               </a:spcAft>
             </a:pPr>
             <a:r>
-              <a:rPr sz="1400" b="1">
+              <a:rPr sz="1600" b="1">
                 <a:solidFill>
                   <a:srgbClr val="1F2A4E"/>
                 </a:solidFill>
@@ -3437,7 +3437,7 @@
               <a:t>Data:  </a:t>
             </a:r>
             <a:r>
-              <a:rPr sz="1400">
+              <a:rPr sz="1600">
                 <a:solidFill>
                   <a:srgbClr val="3D424E"/>
                 </a:solidFill>
@@ -3452,7 +3452,7 @@
               </a:spcAft>
             </a:pPr>
             <a:r>
-              <a:rPr sz="1400" b="1">
+              <a:rPr sz="1600" b="1">
                 <a:solidFill>
                   <a:srgbClr val="1F2A4E"/>
                 </a:solidFill>
@@ -3460,7 +3460,7 @@
               <a:t>Local:  </a:t>
             </a:r>
             <a:r>
-              <a:rPr sz="1400">
+              <a:rPr sz="1600">
                 <a:solidFill>
                   <a:srgbClr val="3D424E"/>
                 </a:solidFill>
@@ -3496,8 +3496,8 @@
         </p:nvSpPr>
         <p:spPr>
           <a:xfrm>
-            <a:off x="457200" y="320040"/>
-            <a:ext cx="11430000" cy="822960"/>
+            <a:off x="457200" y="274320"/>
+            <a:ext cx="11430000" cy="914400"/>
           </a:xfrm>
           <a:prstGeom prst="rect">
             <a:avLst/>
@@ -3511,7 +3511,7 @@
           <a:lstStyle/>
           <a:p>
             <a:pPr>
-              <a:defRPr sz="2600" b="1">
+              <a:defRPr sz="2800" b="1">
                 <a:solidFill>
                   <a:srgbClr val="1F2A4E"/>
                 </a:solidFill>
@@ -3595,7 +3595,7 @@
                     <a:lstStyle/>
                     <a:p>
                       <a:r>
-                        <a:rPr sz="1300" b="1">
+                        <a:rPr sz="1500" b="1">
                           <a:solidFill>
                             <a:srgbClr val="FFFFFF"/>
                           </a:solidFill>
@@ -3616,7 +3616,7 @@
                     <a:lstStyle/>
                     <a:p>
                       <a:r>
-                        <a:rPr sz="1300" b="1">
+                        <a:rPr sz="1500" b="1">
                           <a:solidFill>
                             <a:srgbClr val="FFFFFF"/>
                           </a:solidFill>
@@ -3639,7 +3639,7 @@
                     <a:lstStyle/>
                     <a:p>
                       <a:r>
-                        <a:rPr sz="1300">
+                        <a:rPr sz="1500">
                           <a:solidFill>
                             <a:srgbClr val="3D424E"/>
                           </a:solidFill>
@@ -3656,7 +3656,7 @@
                     <a:lstStyle/>
                     <a:p>
                       <a:r>
-                        <a:rPr sz="1300">
+                        <a:rPr sz="1500">
                           <a:solidFill>
                             <a:srgbClr val="3D424E"/>
                           </a:solidFill>
@@ -3675,7 +3675,7 @@
                     <a:lstStyle/>
                     <a:p>
                       <a:r>
-                        <a:rPr sz="1300">
+                        <a:rPr sz="1500">
                           <a:solidFill>
                             <a:srgbClr val="3D424E"/>
                           </a:solidFill>
@@ -3692,7 +3692,7 @@
                     <a:lstStyle/>
                     <a:p>
                       <a:r>
-                        <a:rPr sz="1300">
+                        <a:rPr sz="1500">
                           <a:solidFill>
                             <a:srgbClr val="3D424E"/>
                           </a:solidFill>
@@ -3711,7 +3711,7 @@
                     <a:lstStyle/>
                     <a:p>
                       <a:r>
-                        <a:rPr sz="1300">
+                        <a:rPr sz="1500">
                           <a:solidFill>
                             <a:srgbClr val="3D424E"/>
                           </a:solidFill>
@@ -3732,7 +3732,7 @@
                     <a:lstStyle/>
                     <a:p>
                       <a:r>
-                        <a:rPr sz="1300">
+                        <a:rPr sz="1500">
                           <a:solidFill>
                             <a:srgbClr val="3D424E"/>
                           </a:solidFill>
@@ -3755,7 +3755,7 @@
                     <a:lstStyle/>
                     <a:p>
                       <a:r>
-                        <a:rPr sz="1300">
+                        <a:rPr sz="1500">
                           <a:solidFill>
                             <a:srgbClr val="3D424E"/>
                           </a:solidFill>
@@ -3772,7 +3772,7 @@
                     <a:lstStyle/>
                     <a:p>
                       <a:r>
-                        <a:rPr sz="1300">
+                        <a:rPr sz="1500">
                           <a:solidFill>
                             <a:srgbClr val="3D424E"/>
                           </a:solidFill>
@@ -3791,7 +3791,7 @@
                     <a:lstStyle/>
                     <a:p>
                       <a:r>
-                        <a:rPr sz="1300">
+                        <a:rPr sz="1500">
                           <a:solidFill>
                             <a:srgbClr val="3D424E"/>
                           </a:solidFill>
@@ -3808,7 +3808,7 @@
                     <a:lstStyle/>
                     <a:p>
                       <a:r>
-                        <a:rPr sz="1300">
+                        <a:rPr sz="1500">
                           <a:solidFill>
                             <a:srgbClr val="3D424E"/>
                           </a:solidFill>
@@ -3827,7 +3827,7 @@
                     <a:lstStyle/>
                     <a:p>
                       <a:r>
-                        <a:rPr sz="1300">
+                        <a:rPr sz="1500">
                           <a:solidFill>
                             <a:srgbClr val="3D424E"/>
                           </a:solidFill>
@@ -3848,7 +3848,7 @@
                     <a:lstStyle/>
                     <a:p>
                       <a:r>
-                        <a:rPr sz="1300">
+                        <a:rPr sz="1500">
                           <a:solidFill>
                             <a:srgbClr val="3D424E"/>
                           </a:solidFill>
@@ -3964,8 +3964,8 @@
         </p:nvSpPr>
         <p:spPr>
           <a:xfrm>
-            <a:off x="457200" y="320040"/>
-            <a:ext cx="11430000" cy="822960"/>
+            <a:off x="457200" y="274320"/>
+            <a:ext cx="11430000" cy="914400"/>
           </a:xfrm>
           <a:prstGeom prst="rect">
             <a:avLst/>
@@ -3979,7 +3979,7 @@
           <a:lstStyle/>
           <a:p>
             <a:pPr>
-              <a:defRPr sz="2600" b="1">
+              <a:defRPr sz="2800" b="1">
                 <a:solidFill>
                   <a:srgbClr val="1F2A4E"/>
                 </a:solidFill>
@@ -4064,7 +4064,7 @@
                     <a:lstStyle/>
                     <a:p>
                       <a:r>
-                        <a:rPr sz="1300" b="1">
+                        <a:rPr sz="1500" b="1">
                           <a:solidFill>
                             <a:srgbClr val="FFFFFF"/>
                           </a:solidFill>
@@ -4085,7 +4085,7 @@
                     <a:lstStyle/>
                     <a:p>
                       <a:r>
-                        <a:rPr sz="1300" b="1">
+                        <a:rPr sz="1500" b="1">
                           <a:solidFill>
                             <a:srgbClr val="FFFFFF"/>
                           </a:solidFill>
@@ -4106,7 +4106,7 @@
                     <a:lstStyle/>
                     <a:p>
                       <a:r>
-                        <a:rPr sz="1300" b="1">
+                        <a:rPr sz="1500" b="1">
                           <a:solidFill>
                             <a:srgbClr val="FFFFFF"/>
                           </a:solidFill>
@@ -4129,7 +4129,7 @@
                     <a:lstStyle/>
                     <a:p>
                       <a:r>
-                        <a:rPr sz="1100">
+                        <a:rPr sz="1300">
                           <a:solidFill>
                             <a:srgbClr val="3D424E"/>
                           </a:solidFill>
@@ -4146,7 +4146,7 @@
                     <a:lstStyle/>
                     <a:p>
                       <a:r>
-                        <a:rPr sz="1100">
+                        <a:rPr sz="1300">
                           <a:solidFill>
                             <a:srgbClr val="3D424E"/>
                           </a:solidFill>
@@ -4163,7 +4163,7 @@
                     <a:lstStyle/>
                     <a:p>
                       <a:r>
-                        <a:rPr sz="1100">
+                        <a:rPr sz="1300">
                           <a:solidFill>
                             <a:srgbClr val="3D424E"/>
                           </a:solidFill>
@@ -4182,7 +4182,7 @@
                     <a:lstStyle/>
                     <a:p>
                       <a:r>
-                        <a:rPr sz="1100">
+                        <a:rPr sz="1300">
                           <a:solidFill>
                             <a:srgbClr val="3D424E"/>
                           </a:solidFill>
@@ -4199,7 +4199,7 @@
                     <a:lstStyle/>
                     <a:p>
                       <a:r>
-                        <a:rPr sz="1100">
+                        <a:rPr sz="1300">
                           <a:solidFill>
                             <a:srgbClr val="3D424E"/>
                           </a:solidFill>
@@ -4216,7 +4216,7 @@
                     <a:lstStyle/>
                     <a:p>
                       <a:r>
-                        <a:rPr sz="1100">
+                        <a:rPr sz="1300">
                           <a:solidFill>
                             <a:srgbClr val="3D424E"/>
                           </a:solidFill>
@@ -4235,7 +4235,7 @@
                     <a:lstStyle/>
                     <a:p>
                       <a:r>
-                        <a:rPr sz="1100">
+                        <a:rPr sz="1300">
                           <a:solidFill>
                             <a:srgbClr val="3D424E"/>
                           </a:solidFill>
@@ -4252,7 +4252,7 @@
                     <a:lstStyle/>
                     <a:p>
                       <a:r>
-                        <a:rPr sz="1100">
+                        <a:rPr sz="1300">
                           <a:solidFill>
                             <a:srgbClr val="3D424E"/>
                           </a:solidFill>
@@ -4269,7 +4269,7 @@
                     <a:lstStyle/>
                     <a:p>
                       <a:r>
-                        <a:rPr sz="1100">
+                        <a:rPr sz="1300">
                           <a:solidFill>
                             <a:srgbClr val="3D424E"/>
                           </a:solidFill>
@@ -4288,7 +4288,7 @@
                     <a:lstStyle/>
                     <a:p>
                       <a:r>
-                        <a:rPr sz="1100">
+                        <a:rPr sz="1300">
                           <a:solidFill>
                             <a:srgbClr val="3D424E"/>
                           </a:solidFill>
@@ -4305,7 +4305,7 @@
                     <a:lstStyle/>
                     <a:p>
                       <a:r>
-                        <a:rPr sz="1100">
+                        <a:rPr sz="1300">
                           <a:solidFill>
                             <a:srgbClr val="3D424E"/>
                           </a:solidFill>
@@ -4322,7 +4322,7 @@
                     <a:lstStyle/>
                     <a:p>
                       <a:r>
-                        <a:rPr sz="1100">
+                        <a:rPr sz="1300">
                           <a:solidFill>
                             <a:srgbClr val="3D424E"/>
                           </a:solidFill>
@@ -4341,7 +4341,7 @@
                     <a:lstStyle/>
                     <a:p>
                       <a:r>
-                        <a:rPr sz="1100">
+                        <a:rPr sz="1300">
                           <a:solidFill>
                             <a:srgbClr val="3D424E"/>
                           </a:solidFill>
@@ -4358,7 +4358,7 @@
                     <a:lstStyle/>
                     <a:p>
                       <a:r>
-                        <a:rPr sz="1100">
+                        <a:rPr sz="1300">
                           <a:solidFill>
                             <a:srgbClr val="3D424E"/>
                           </a:solidFill>
@@ -4375,7 +4375,7 @@
                     <a:lstStyle/>
                     <a:p>
                       <a:r>
-                        <a:rPr sz="1100">
+                        <a:rPr sz="1300">
                           <a:solidFill>
                             <a:srgbClr val="3D424E"/>
                           </a:solidFill>
@@ -4394,7 +4394,7 @@
                     <a:lstStyle/>
                     <a:p>
                       <a:r>
-                        <a:rPr sz="1100">
+                        <a:rPr sz="1300">
                           <a:solidFill>
                             <a:srgbClr val="3D424E"/>
                           </a:solidFill>
@@ -4411,7 +4411,7 @@
                     <a:lstStyle/>
                     <a:p>
                       <a:r>
-                        <a:rPr sz="1100">
+                        <a:rPr sz="1300">
                           <a:solidFill>
                             <a:srgbClr val="3D424E"/>
                           </a:solidFill>
@@ -4428,7 +4428,7 @@
                     <a:lstStyle/>
                     <a:p>
                       <a:r>
-                        <a:rPr sz="1100">
+                        <a:rPr sz="1300">
                           <a:solidFill>
                             <a:srgbClr val="3D424E"/>
                           </a:solidFill>
@@ -4540,8 +4540,8 @@
         </p:nvSpPr>
         <p:spPr>
           <a:xfrm>
-            <a:off x="457200" y="320040"/>
-            <a:ext cx="11430000" cy="822960"/>
+            <a:off x="457200" y="274320"/>
+            <a:ext cx="11430000" cy="914400"/>
           </a:xfrm>
           <a:prstGeom prst="rect">
             <a:avLst/>
@@ -4555,7 +4555,7 @@
           <a:lstStyle/>
           <a:p>
             <a:pPr>
-              <a:defRPr sz="2600" b="1">
+              <a:defRPr sz="2800" b="1">
                 <a:solidFill>
                   <a:srgbClr val="1F2A4E"/>
                 </a:solidFill>
@@ -4657,7 +4657,7 @@
           <a:lstStyle/>
           <a:p>
             <a:pPr algn="ctr">
-              <a:defRPr sz="1100" i="1">
+              <a:defRPr sz="1300" i="1">
                 <a:solidFill>
                   <a:srgbClr val="707682"/>
                 </a:solidFill>
@@ -4765,8 +4765,8 @@
         </p:nvSpPr>
         <p:spPr>
           <a:xfrm>
-            <a:off x="457200" y="320040"/>
-            <a:ext cx="11430000" cy="822960"/>
+            <a:off x="457200" y="274320"/>
+            <a:ext cx="11430000" cy="914400"/>
           </a:xfrm>
           <a:prstGeom prst="rect">
             <a:avLst/>
@@ -4780,7 +4780,7 @@
           <a:lstStyle/>
           <a:p>
             <a:pPr>
-              <a:defRPr sz="2600" b="1">
+              <a:defRPr sz="2800" b="1">
                 <a:solidFill>
                   <a:srgbClr val="1F2A4E"/>
                 </a:solidFill>
@@ -4865,7 +4865,7 @@
                     <a:lstStyle/>
                     <a:p>
                       <a:r>
-                        <a:rPr sz="1300" b="1">
+                        <a:rPr sz="1500" b="1">
                           <a:solidFill>
                             <a:srgbClr val="FFFFFF"/>
                           </a:solidFill>
@@ -4886,7 +4886,7 @@
                     <a:lstStyle/>
                     <a:p>
                       <a:r>
-                        <a:rPr sz="1300" b="1">
+                        <a:rPr sz="1500" b="1">
                           <a:solidFill>
                             <a:srgbClr val="FFFFFF"/>
                           </a:solidFill>
@@ -4907,7 +4907,7 @@
                     <a:lstStyle/>
                     <a:p>
                       <a:r>
-                        <a:rPr sz="1300" b="1">
+                        <a:rPr sz="1500" b="1">
                           <a:solidFill>
                             <a:srgbClr val="FFFFFF"/>
                           </a:solidFill>
@@ -4930,7 +4930,7 @@
                     <a:lstStyle/>
                     <a:p>
                       <a:r>
-                        <a:rPr sz="1100">
+                        <a:rPr sz="1300">
                           <a:solidFill>
                             <a:srgbClr val="3D424E"/>
                           </a:solidFill>
@@ -4947,7 +4947,7 @@
                     <a:lstStyle/>
                     <a:p>
                       <a:r>
-                        <a:rPr sz="1100">
+                        <a:rPr sz="1300">
                           <a:solidFill>
                             <a:srgbClr val="3D424E"/>
                           </a:solidFill>
@@ -4964,7 +4964,7 @@
                     <a:lstStyle/>
                     <a:p>
                       <a:r>
-                        <a:rPr sz="1100">
+                        <a:rPr sz="1300">
                           <a:solidFill>
                             <a:srgbClr val="3D424E"/>
                           </a:solidFill>
@@ -4983,7 +4983,7 @@
                     <a:lstStyle/>
                     <a:p>
                       <a:r>
-                        <a:rPr sz="1100">
+                        <a:rPr sz="1300">
                           <a:solidFill>
                             <a:srgbClr val="3D424E"/>
                           </a:solidFill>
@@ -5000,7 +5000,7 @@
                     <a:lstStyle/>
                     <a:p>
                       <a:r>
-                        <a:rPr sz="1100">
+                        <a:rPr sz="1300">
                           <a:solidFill>
                             <a:srgbClr val="3D424E"/>
                           </a:solidFill>
@@ -5017,7 +5017,7 @@
                     <a:lstStyle/>
                     <a:p>
                       <a:r>
-                        <a:rPr sz="1100">
+                        <a:rPr sz="1300">
                           <a:solidFill>
                             <a:srgbClr val="3D424E"/>
                           </a:solidFill>
@@ -5036,7 +5036,7 @@
                     <a:lstStyle/>
                     <a:p>
                       <a:r>
-                        <a:rPr sz="1100">
+                        <a:rPr sz="1300">
                           <a:solidFill>
                             <a:srgbClr val="3D424E"/>
                           </a:solidFill>
@@ -5053,7 +5053,7 @@
                     <a:lstStyle/>
                     <a:p>
                       <a:r>
-                        <a:rPr sz="1100">
+                        <a:rPr sz="1300">
                           <a:solidFill>
                             <a:srgbClr val="3D424E"/>
                           </a:solidFill>
@@ -5070,7 +5070,7 @@
                     <a:lstStyle/>
                     <a:p>
                       <a:r>
-                        <a:rPr sz="1100">
+                        <a:rPr sz="1300">
                           <a:solidFill>
                             <a:srgbClr val="3D424E"/>
                           </a:solidFill>
@@ -5089,7 +5089,7 @@
                     <a:lstStyle/>
                     <a:p>
                       <a:r>
-                        <a:rPr sz="1100">
+                        <a:rPr sz="1300">
                           <a:solidFill>
                             <a:srgbClr val="3D424E"/>
                           </a:solidFill>
@@ -5106,7 +5106,7 @@
                     <a:lstStyle/>
                     <a:p>
                       <a:r>
-                        <a:rPr sz="1100">
+                        <a:rPr sz="1300">
                           <a:solidFill>
                             <a:srgbClr val="3D424E"/>
                           </a:solidFill>
@@ -5123,7 +5123,7 @@
                     <a:lstStyle/>
                     <a:p>
                       <a:r>
-                        <a:rPr sz="1100">
+                        <a:rPr sz="1300">
                           <a:solidFill>
                             <a:srgbClr val="3D424E"/>
                           </a:solidFill>
@@ -5142,7 +5142,7 @@
                     <a:lstStyle/>
                     <a:p>
                       <a:r>
-                        <a:rPr sz="1100">
+                        <a:rPr sz="1300">
                           <a:solidFill>
                             <a:srgbClr val="3D424E"/>
                           </a:solidFill>
@@ -5159,7 +5159,7 @@
                     <a:lstStyle/>
                     <a:p>
                       <a:r>
-                        <a:rPr sz="1100">
+                        <a:rPr sz="1300">
                           <a:solidFill>
                             <a:srgbClr val="3D424E"/>
                           </a:solidFill>
@@ -5176,7 +5176,7 @@
                     <a:lstStyle/>
                     <a:p>
                       <a:r>
-                        <a:rPr sz="1100">
+                        <a:rPr sz="1300">
                           <a:solidFill>
                             <a:srgbClr val="3D424E"/>
                           </a:solidFill>
@@ -5195,7 +5195,7 @@
                     <a:lstStyle/>
                     <a:p>
                       <a:r>
-                        <a:rPr sz="1100">
+                        <a:rPr sz="1300">
                           <a:solidFill>
                             <a:srgbClr val="3D424E"/>
                           </a:solidFill>
@@ -5212,7 +5212,7 @@
                     <a:lstStyle/>
                     <a:p>
                       <a:r>
-                        <a:rPr sz="1100">
+                        <a:rPr sz="1300">
                           <a:solidFill>
                             <a:srgbClr val="3D424E"/>
                           </a:solidFill>
@@ -5229,7 +5229,7 @@
                     <a:lstStyle/>
                     <a:p>
                       <a:r>
-                        <a:rPr sz="1100">
+                        <a:rPr sz="1300">
                           <a:solidFill>
                             <a:srgbClr val="3D424E"/>
                           </a:solidFill>
@@ -5341,8 +5341,8 @@
         </p:nvSpPr>
         <p:spPr>
           <a:xfrm>
-            <a:off x="457200" y="320040"/>
-            <a:ext cx="11430000" cy="822960"/>
+            <a:off x="457200" y="274320"/>
+            <a:ext cx="11430000" cy="914400"/>
           </a:xfrm>
           <a:prstGeom prst="rect">
             <a:avLst/>
@@ -5356,7 +5356,7 @@
           <a:lstStyle/>
           <a:p>
             <a:pPr>
-              <a:defRPr sz="2600" b="1">
+              <a:defRPr sz="2800" b="1">
                 <a:solidFill>
                   <a:srgbClr val="1F2A4E"/>
                 </a:solidFill>
@@ -5419,7 +5419,7 @@
         </p:nvSpPr>
         <p:spPr>
           <a:xfrm>
-            <a:off x="457200" y="1371600"/>
+            <a:off x="457200" y="1417320"/>
             <a:ext cx="11430000" cy="4937760"/>
           </a:xfrm>
           <a:prstGeom prst="rect">
@@ -5435,11 +5435,11 @@
           <a:p>
             <a:pPr>
               <a:spcAft>
-                <a:spcPts val="600"/>
+                <a:spcPts val="1000"/>
               </a:spcAft>
             </a:pPr>
             <a:r>
-              <a:rPr sz="1500" b="1">
+              <a:rPr sz="1800" b="1">
                 <a:solidFill>
                   <a:srgbClr val="1F2A4E"/>
                 </a:solidFill>
@@ -5447,7 +5447,7 @@
               <a:t>Antropologia biológica — Telles (2014):  </a:t>
             </a:r>
             <a:r>
-              <a:rPr sz="1500">
+              <a:rPr sz="1800">
                 <a:solidFill>
                   <a:srgbClr val="3D424E"/>
                 </a:solidFill>
@@ -5458,11 +5458,11 @@
           <a:p>
             <a:pPr>
               <a:spcAft>
-                <a:spcPts val="600"/>
+                <a:spcPts val="1000"/>
               </a:spcAft>
             </a:pPr>
             <a:r>
-              <a:rPr sz="1500" b="1">
+              <a:rPr sz="1800" b="1">
                 <a:solidFill>
                   <a:srgbClr val="1F2A4E"/>
                 </a:solidFill>
@@ -5470,7 +5470,7 @@
               <a:t>Genética populacional — Bryc et al. (2015, AJHG):  </a:t>
             </a:r>
             <a:r>
-              <a:rPr sz="1500">
+              <a:rPr sz="1800">
                 <a:solidFill>
                   <a:srgbClr val="3D424E"/>
                 </a:solidFill>
@@ -5481,11 +5481,11 @@
           <a:p>
             <a:pPr>
               <a:spcAft>
-                <a:spcPts val="600"/>
+                <a:spcPts val="1000"/>
               </a:spcAft>
             </a:pPr>
             <a:r>
-              <a:rPr sz="1500" b="1">
+              <a:rPr sz="1800" b="1">
                 <a:solidFill>
                   <a:srgbClr val="1F2A4E"/>
                 </a:solidFill>
@@ -5493,7 +5493,7 @@
               <a:t>Sociologia identitária — Pew Research (López et al., 2017):  </a:t>
             </a:r>
             <a:r>
-              <a:rPr sz="1500">
+              <a:rPr sz="1800">
                 <a:solidFill>
                   <a:srgbClr val="3D424E"/>
                 </a:solidFill>
@@ -5504,9 +5504,9 @@
           <a:p>
             <a:pPr>
               <a:spcAft>
-                <a:spcPts val="600"/>
+                <a:spcPts val="1000"/>
               </a:spcAft>
-              <a:defRPr sz="1500">
+              <a:defRPr sz="1800">
                 <a:solidFill>
                   <a:srgbClr val="3D424E"/>
                 </a:solidFill>
@@ -5519,11 +5519,11 @@
           <a:p>
             <a:pPr>
               <a:spcAft>
-                <a:spcPts val="600"/>
+                <a:spcPts val="1000"/>
               </a:spcAft>
             </a:pPr>
             <a:r>
-              <a:rPr sz="1500" b="1">
+              <a:rPr sz="1800" b="1">
                 <a:solidFill>
                   <a:srgbClr val="1F2A4E"/>
                 </a:solidFill>
@@ -5531,7 +5531,7 @@
               <a:t>Consequência metodológica:  </a:t>
             </a:r>
             <a:r>
-              <a:rPr sz="1500">
+              <a:rPr sz="1800">
                 <a:solidFill>
                   <a:srgbClr val="3D424E"/>
                 </a:solidFill>
@@ -5637,8 +5637,8 @@
         </p:nvSpPr>
         <p:spPr>
           <a:xfrm>
-            <a:off x="457200" y="320040"/>
-            <a:ext cx="11430000" cy="822960"/>
+            <a:off x="457200" y="274320"/>
+            <a:ext cx="11430000" cy="914400"/>
           </a:xfrm>
           <a:prstGeom prst="rect">
             <a:avLst/>
@@ -5652,7 +5652,7 @@
           <a:lstStyle/>
           <a:p>
             <a:pPr>
-              <a:defRPr sz="2600" b="1">
+              <a:defRPr sz="2800" b="1">
                 <a:solidFill>
                   <a:srgbClr val="1F2A4E"/>
                 </a:solidFill>
@@ -5737,7 +5737,7 @@
                     <a:lstStyle/>
                     <a:p>
                       <a:r>
-                        <a:rPr sz="1300" b="1">
+                        <a:rPr sz="1500" b="1">
                           <a:solidFill>
                             <a:srgbClr val="FFFFFF"/>
                           </a:solidFill>
@@ -5758,7 +5758,7 @@
                     <a:lstStyle/>
                     <a:p>
                       <a:r>
-                        <a:rPr sz="1300" b="1">
+                        <a:rPr sz="1500" b="1">
                           <a:solidFill>
                             <a:srgbClr val="FFFFFF"/>
                           </a:solidFill>
@@ -5779,7 +5779,7 @@
                     <a:lstStyle/>
                     <a:p>
                       <a:r>
-                        <a:rPr sz="1300" b="1">
+                        <a:rPr sz="1500" b="1">
                           <a:solidFill>
                             <a:srgbClr val="FFFFFF"/>
                           </a:solidFill>
@@ -5802,7 +5802,7 @@
                     <a:lstStyle/>
                     <a:p>
                       <a:r>
-                        <a:rPr sz="1100">
+                        <a:rPr sz="1300">
                           <a:solidFill>
                             <a:srgbClr val="3D424E"/>
                           </a:solidFill>
@@ -5819,7 +5819,7 @@
                     <a:lstStyle/>
                     <a:p>
                       <a:r>
-                        <a:rPr sz="1100">
+                        <a:rPr sz="1300">
                           <a:solidFill>
                             <a:srgbClr val="3D424E"/>
                           </a:solidFill>
@@ -5836,7 +5836,7 @@
                     <a:lstStyle/>
                     <a:p>
                       <a:r>
-                        <a:rPr sz="1100">
+                        <a:rPr sz="1300">
                           <a:solidFill>
                             <a:srgbClr val="3D424E"/>
                           </a:solidFill>
@@ -5855,7 +5855,7 @@
                     <a:lstStyle/>
                     <a:p>
                       <a:r>
-                        <a:rPr sz="1100">
+                        <a:rPr sz="1300">
                           <a:solidFill>
                             <a:srgbClr val="3D424E"/>
                           </a:solidFill>
@@ -5872,7 +5872,7 @@
                     <a:lstStyle/>
                     <a:p>
                       <a:r>
-                        <a:rPr sz="1100">
+                        <a:rPr sz="1300">
                           <a:solidFill>
                             <a:srgbClr val="3D424E"/>
                           </a:solidFill>
@@ -5889,7 +5889,7 @@
                     <a:lstStyle/>
                     <a:p>
                       <a:r>
-                        <a:rPr sz="1100">
+                        <a:rPr sz="1300">
                           <a:solidFill>
                             <a:srgbClr val="3D424E"/>
                           </a:solidFill>
@@ -5908,7 +5908,7 @@
                     <a:lstStyle/>
                     <a:p>
                       <a:r>
-                        <a:rPr sz="1100">
+                        <a:rPr sz="1300">
                           <a:solidFill>
                             <a:srgbClr val="3D424E"/>
                           </a:solidFill>
@@ -5925,7 +5925,7 @@
                     <a:lstStyle/>
                     <a:p>
                       <a:r>
-                        <a:rPr sz="1100">
+                        <a:rPr sz="1300">
                           <a:solidFill>
                             <a:srgbClr val="3D424E"/>
                           </a:solidFill>
@@ -5942,7 +5942,7 @@
                     <a:lstStyle/>
                     <a:p>
                       <a:r>
-                        <a:rPr sz="1100">
+                        <a:rPr sz="1300">
                           <a:solidFill>
                             <a:srgbClr val="3D424E"/>
                           </a:solidFill>
@@ -5961,7 +5961,7 @@
                     <a:lstStyle/>
                     <a:p>
                       <a:r>
-                        <a:rPr sz="1100">
+                        <a:rPr sz="1300">
                           <a:solidFill>
                             <a:srgbClr val="3D424E"/>
                           </a:solidFill>
@@ -5978,7 +5978,7 @@
                     <a:lstStyle/>
                     <a:p>
                       <a:r>
-                        <a:rPr sz="1100">
+                        <a:rPr sz="1300">
                           <a:solidFill>
                             <a:srgbClr val="3D424E"/>
                           </a:solidFill>
@@ -5995,7 +5995,7 @@
                     <a:lstStyle/>
                     <a:p>
                       <a:r>
-                        <a:rPr sz="1100">
+                        <a:rPr sz="1300">
                           <a:solidFill>
                             <a:srgbClr val="3D424E"/>
                           </a:solidFill>
@@ -6014,7 +6014,7 @@
                     <a:lstStyle/>
                     <a:p>
                       <a:r>
-                        <a:rPr sz="1100">
+                        <a:rPr sz="1300">
                           <a:solidFill>
                             <a:srgbClr val="3D424E"/>
                           </a:solidFill>
@@ -6031,7 +6031,7 @@
                     <a:lstStyle/>
                     <a:p>
                       <a:r>
-                        <a:rPr sz="1100">
+                        <a:rPr sz="1300">
                           <a:solidFill>
                             <a:srgbClr val="3D424E"/>
                           </a:solidFill>
@@ -6048,7 +6048,7 @@
                     <a:lstStyle/>
                     <a:p>
                       <a:r>
-                        <a:rPr sz="1100">
+                        <a:rPr sz="1300">
                           <a:solidFill>
                             <a:srgbClr val="3D424E"/>
                           </a:solidFill>
@@ -6160,8 +6160,8 @@
         </p:nvSpPr>
         <p:spPr>
           <a:xfrm>
-            <a:off x="457200" y="320040"/>
-            <a:ext cx="11430000" cy="822960"/>
+            <a:off x="457200" y="274320"/>
+            <a:ext cx="11430000" cy="914400"/>
           </a:xfrm>
           <a:prstGeom prst="rect">
             <a:avLst/>
@@ -6175,7 +6175,7 @@
           <a:lstStyle/>
           <a:p>
             <a:pPr>
-              <a:defRPr sz="2600" b="1">
+              <a:defRPr sz="2800" b="1">
                 <a:solidFill>
                   <a:srgbClr val="1F2A4E"/>
                 </a:solidFill>
@@ -6277,7 +6277,7 @@
           <a:lstStyle/>
           <a:p>
             <a:pPr algn="ctr">
-              <a:defRPr sz="1100" i="1">
+              <a:defRPr sz="1300" i="1">
                 <a:solidFill>
                   <a:srgbClr val="707682"/>
                 </a:solidFill>
@@ -6385,8 +6385,8 @@
         </p:nvSpPr>
         <p:spPr>
           <a:xfrm>
-            <a:off x="457200" y="320040"/>
-            <a:ext cx="11430000" cy="822960"/>
+            <a:off x="457200" y="274320"/>
+            <a:ext cx="11430000" cy="914400"/>
           </a:xfrm>
           <a:prstGeom prst="rect">
             <a:avLst/>
@@ -6400,7 +6400,7 @@
           <a:lstStyle/>
           <a:p>
             <a:pPr>
-              <a:defRPr sz="2600" b="1">
+              <a:defRPr sz="2800" b="1">
                 <a:solidFill>
                   <a:srgbClr val="1F2A4E"/>
                 </a:solidFill>
@@ -6463,7 +6463,7 @@
         </p:nvSpPr>
         <p:spPr>
           <a:xfrm>
-            <a:off x="457200" y="1371600"/>
+            <a:off x="457200" y="1417320"/>
             <a:ext cx="11430000" cy="4937760"/>
           </a:xfrm>
           <a:prstGeom prst="rect">
@@ -6479,11 +6479,11 @@
           <a:p>
             <a:pPr>
               <a:spcAft>
-                <a:spcPts val="600"/>
+                <a:spcPts val="1000"/>
               </a:spcAft>
             </a:pPr>
             <a:r>
-              <a:rPr sz="1500" b="1">
+              <a:rPr sz="1800" b="1">
                 <a:solidFill>
                   <a:srgbClr val="1F2A4E"/>
                 </a:solidFill>
@@ -6491,7 +6491,7 @@
               <a:t>O que faz:  </a:t>
             </a:r>
             <a:r>
-              <a:rPr sz="1500">
+              <a:rPr sz="1800">
                 <a:solidFill>
                   <a:srgbClr val="3D424E"/>
                 </a:solidFill>
@@ -6502,11 +6502,11 @@
           <a:p>
             <a:pPr>
               <a:spcAft>
-                <a:spcPts val="600"/>
+                <a:spcPts val="1000"/>
               </a:spcAft>
             </a:pPr>
             <a:r>
-              <a:rPr sz="1500" b="1">
+              <a:rPr sz="1800" b="1">
                 <a:solidFill>
                   <a:srgbClr val="1F2A4E"/>
                 </a:solidFill>
@@ -6514,7 +6514,7 @@
               <a:t>Decisão pós-reunião Ago/2026:  </a:t>
             </a:r>
             <a:r>
-              <a:rPr sz="1500">
+              <a:rPr sz="1800">
                 <a:solidFill>
                   <a:srgbClr val="3D424E"/>
                 </a:solidFill>
@@ -6525,11 +6525,11 @@
           <a:p>
             <a:pPr>
               <a:spcAft>
-                <a:spcPts val="600"/>
+                <a:spcPts val="1000"/>
               </a:spcAft>
             </a:pPr>
             <a:r>
-              <a:rPr sz="1500" b="1">
+              <a:rPr sz="1800" b="1">
                 <a:solidFill>
                   <a:srgbClr val="1F2A4E"/>
                 </a:solidFill>
@@ -6537,7 +6537,7 @@
               <a:t>Datasets de treino:  </a:t>
             </a:r>
             <a:r>
-              <a:rPr sz="1500">
+              <a:rPr sz="1800">
                 <a:solidFill>
                   <a:srgbClr val="3D424E"/>
                 </a:solidFill>
@@ -6548,11 +6548,11 @@
           <a:p>
             <a:pPr>
               <a:spcAft>
-                <a:spcPts val="600"/>
+                <a:spcPts val="1000"/>
               </a:spcAft>
             </a:pPr>
             <a:r>
-              <a:rPr sz="1500" b="1">
+              <a:rPr sz="1800" b="1">
                 <a:solidFill>
                   <a:srgbClr val="1F2A4E"/>
                 </a:solidFill>
@@ -6560,7 +6560,7 @@
               <a:t>Camada auto-suficiente:  </a:t>
             </a:r>
             <a:r>
-              <a:rPr sz="1500">
+              <a:rPr sz="1800">
                 <a:solidFill>
                   <a:srgbClr val="3D424E"/>
                 </a:solidFill>
@@ -6571,11 +6571,11 @@
           <a:p>
             <a:pPr>
               <a:spcAft>
-                <a:spcPts val="600"/>
+                <a:spcPts val="1000"/>
               </a:spcAft>
             </a:pPr>
             <a:r>
-              <a:rPr sz="1500" b="1">
+              <a:rPr sz="1800" b="1">
                 <a:solidFill>
                   <a:srgbClr val="1F2A4E"/>
                 </a:solidFill>
@@ -6583,7 +6583,7 @@
               <a:t>Validação:  </a:t>
             </a:r>
             <a:r>
-              <a:rPr sz="1500">
+              <a:rPr sz="1800">
                 <a:solidFill>
                   <a:srgbClr val="3D424E"/>
                 </a:solidFill>
@@ -6689,8 +6689,8 @@
         </p:nvSpPr>
         <p:spPr>
           <a:xfrm>
-            <a:off x="457200" y="320040"/>
-            <a:ext cx="11430000" cy="822960"/>
+            <a:off x="457200" y="274320"/>
+            <a:ext cx="11430000" cy="914400"/>
           </a:xfrm>
           <a:prstGeom prst="rect">
             <a:avLst/>
@@ -6704,7 +6704,7 @@
           <a:lstStyle/>
           <a:p>
             <a:pPr>
-              <a:defRPr sz="2600" b="1">
+              <a:defRPr sz="2800" b="1">
                 <a:solidFill>
                   <a:srgbClr val="1F2A4E"/>
                 </a:solidFill>
@@ -6790,7 +6790,7 @@
                     <a:lstStyle/>
                     <a:p>
                       <a:r>
-                        <a:rPr sz="1300" b="1">
+                        <a:rPr sz="1500" b="1">
                           <a:solidFill>
                             <a:srgbClr val="FFFFFF"/>
                           </a:solidFill>
@@ -6811,7 +6811,7 @@
                     <a:lstStyle/>
                     <a:p>
                       <a:r>
-                        <a:rPr sz="1300" b="1">
+                        <a:rPr sz="1500" b="1">
                           <a:solidFill>
                             <a:srgbClr val="FFFFFF"/>
                           </a:solidFill>
@@ -6832,7 +6832,7 @@
                     <a:lstStyle/>
                     <a:p>
                       <a:r>
-                        <a:rPr sz="1300" b="1">
+                        <a:rPr sz="1500" b="1">
                           <a:solidFill>
                             <a:srgbClr val="FFFFFF"/>
                           </a:solidFill>
@@ -6853,7 +6853,7 @@
                     <a:lstStyle/>
                     <a:p>
                       <a:r>
-                        <a:rPr sz="1300" b="1">
+                        <a:rPr sz="1500" b="1">
                           <a:solidFill>
                             <a:srgbClr val="FFFFFF"/>
                           </a:solidFill>
@@ -6876,7 +6876,7 @@
                     <a:lstStyle/>
                     <a:p>
                       <a:r>
-                        <a:rPr sz="1000">
+                        <a:rPr sz="1200">
                           <a:solidFill>
                             <a:srgbClr val="3D424E"/>
                           </a:solidFill>
@@ -6893,7 +6893,7 @@
                     <a:lstStyle/>
                     <a:p>
                       <a:r>
-                        <a:rPr sz="1000">
+                        <a:rPr sz="1200">
                           <a:solidFill>
                             <a:srgbClr val="3D424E"/>
                           </a:solidFill>
@@ -6910,7 +6910,7 @@
                     <a:lstStyle/>
                     <a:p>
                       <a:r>
-                        <a:rPr sz="1000">
+                        <a:rPr sz="1200">
                           <a:solidFill>
                             <a:srgbClr val="3D424E"/>
                           </a:solidFill>
@@ -6927,7 +6927,7 @@
                     <a:lstStyle/>
                     <a:p>
                       <a:r>
-                        <a:rPr sz="1000">
+                        <a:rPr sz="1200">
                           <a:solidFill>
                             <a:srgbClr val="3D424E"/>
                           </a:solidFill>
@@ -6946,7 +6946,7 @@
                     <a:lstStyle/>
                     <a:p>
                       <a:r>
-                        <a:rPr sz="1000">
+                        <a:rPr sz="1200">
                           <a:solidFill>
                             <a:srgbClr val="3D424E"/>
                           </a:solidFill>
@@ -6963,7 +6963,7 @@
                     <a:lstStyle/>
                     <a:p>
                       <a:r>
-                        <a:rPr sz="1000">
+                        <a:rPr sz="1200">
                           <a:solidFill>
                             <a:srgbClr val="3D424E"/>
                           </a:solidFill>
@@ -6980,7 +6980,7 @@
                     <a:lstStyle/>
                     <a:p>
                       <a:r>
-                        <a:rPr sz="1000">
+                        <a:rPr sz="1200">
                           <a:solidFill>
                             <a:srgbClr val="3D424E"/>
                           </a:solidFill>
@@ -6997,7 +6997,7 @@
                     <a:lstStyle/>
                     <a:p>
                       <a:r>
-                        <a:rPr sz="1000">
+                        <a:rPr sz="1200">
                           <a:solidFill>
                             <a:srgbClr val="3D424E"/>
                           </a:solidFill>
@@ -7016,7 +7016,7 @@
                     <a:lstStyle/>
                     <a:p>
                       <a:r>
-                        <a:rPr sz="1000">
+                        <a:rPr sz="1200">
                           <a:solidFill>
                             <a:srgbClr val="3D424E"/>
                           </a:solidFill>
@@ -7033,7 +7033,7 @@
                     <a:lstStyle/>
                     <a:p>
                       <a:r>
-                        <a:rPr sz="1000">
+                        <a:rPr sz="1200">
                           <a:solidFill>
                             <a:srgbClr val="3D424E"/>
                           </a:solidFill>
@@ -7050,7 +7050,7 @@
                     <a:lstStyle/>
                     <a:p>
                       <a:r>
-                        <a:rPr sz="1000">
+                        <a:rPr sz="1200">
                           <a:solidFill>
                             <a:srgbClr val="3D424E"/>
                           </a:solidFill>
@@ -7067,7 +7067,7 @@
                     <a:lstStyle/>
                     <a:p>
                       <a:r>
-                        <a:rPr sz="1000">
+                        <a:rPr sz="1200">
                           <a:solidFill>
                             <a:srgbClr val="3D424E"/>
                           </a:solidFill>
@@ -7086,7 +7086,7 @@
                     <a:lstStyle/>
                     <a:p>
                       <a:r>
-                        <a:rPr sz="1000">
+                        <a:rPr sz="1200">
                           <a:solidFill>
                             <a:srgbClr val="3D424E"/>
                           </a:solidFill>
@@ -7103,7 +7103,7 @@
                     <a:lstStyle/>
                     <a:p>
                       <a:r>
-                        <a:rPr sz="1000">
+                        <a:rPr sz="1200">
                           <a:solidFill>
                             <a:srgbClr val="3D424E"/>
                           </a:solidFill>
@@ -7120,7 +7120,7 @@
                     <a:lstStyle/>
                     <a:p>
                       <a:r>
-                        <a:rPr sz="1000">
+                        <a:rPr sz="1200">
                           <a:solidFill>
                             <a:srgbClr val="3D424E"/>
                           </a:solidFill>
@@ -7137,7 +7137,7 @@
                     <a:lstStyle/>
                     <a:p>
                       <a:r>
-                        <a:rPr sz="1000">
+                        <a:rPr sz="1200">
                           <a:solidFill>
                             <a:srgbClr val="3D424E"/>
                           </a:solidFill>
@@ -7156,7 +7156,7 @@
                     <a:lstStyle/>
                     <a:p>
                       <a:r>
-                        <a:rPr sz="1000">
+                        <a:rPr sz="1200">
                           <a:solidFill>
                             <a:srgbClr val="3D424E"/>
                           </a:solidFill>
@@ -7173,7 +7173,7 @@
                     <a:lstStyle/>
                     <a:p>
                       <a:r>
-                        <a:rPr sz="1000">
+                        <a:rPr sz="1200">
                           <a:solidFill>
                             <a:srgbClr val="3D424E"/>
                           </a:solidFill>
@@ -7190,7 +7190,7 @@
                     <a:lstStyle/>
                     <a:p>
                       <a:r>
-                        <a:rPr sz="1000">
+                        <a:rPr sz="1200">
                           <a:solidFill>
                             <a:srgbClr val="3D424E"/>
                           </a:solidFill>
@@ -7207,7 +7207,7 @@
                     <a:lstStyle/>
                     <a:p>
                       <a:r>
-                        <a:rPr sz="1000">
+                        <a:rPr sz="1200">
                           <a:solidFill>
                             <a:srgbClr val="3D424E"/>
                           </a:solidFill>
@@ -7319,8 +7319,8 @@
         </p:nvSpPr>
         <p:spPr>
           <a:xfrm>
-            <a:off x="457200" y="320040"/>
-            <a:ext cx="11430000" cy="822960"/>
+            <a:off x="457200" y="274320"/>
+            <a:ext cx="11430000" cy="914400"/>
           </a:xfrm>
           <a:prstGeom prst="rect">
             <a:avLst/>
@@ -7334,7 +7334,7 @@
           <a:lstStyle/>
           <a:p>
             <a:pPr>
-              <a:defRPr sz="2600" b="1">
+              <a:defRPr sz="2800" b="1">
                 <a:solidFill>
                   <a:srgbClr val="1F2A4E"/>
                 </a:solidFill>
@@ -7419,7 +7419,7 @@
                     <a:lstStyle/>
                     <a:p>
                       <a:r>
-                        <a:rPr sz="1300" b="1">
+                        <a:rPr sz="1500" b="1">
                           <a:solidFill>
                             <a:srgbClr val="FFFFFF"/>
                           </a:solidFill>
@@ -7440,7 +7440,7 @@
                     <a:lstStyle/>
                     <a:p>
                       <a:r>
-                        <a:rPr sz="1300" b="1">
+                        <a:rPr sz="1500" b="1">
                           <a:solidFill>
                             <a:srgbClr val="FFFFFF"/>
                           </a:solidFill>
@@ -7461,7 +7461,7 @@
                     <a:lstStyle/>
                     <a:p>
                       <a:r>
-                        <a:rPr sz="1300" b="1">
+                        <a:rPr sz="1500" b="1">
                           <a:solidFill>
                             <a:srgbClr val="FFFFFF"/>
                           </a:solidFill>
@@ -7484,7 +7484,7 @@
                     <a:lstStyle/>
                     <a:p>
                       <a:r>
-                        <a:rPr sz="1000">
+                        <a:rPr sz="1200">
                           <a:solidFill>
                             <a:srgbClr val="3D424E"/>
                           </a:solidFill>
@@ -7501,7 +7501,7 @@
                     <a:lstStyle/>
                     <a:p>
                       <a:r>
-                        <a:rPr sz="1000">
+                        <a:rPr sz="1200">
                           <a:solidFill>
                             <a:srgbClr val="3D424E"/>
                           </a:solidFill>
@@ -7518,7 +7518,7 @@
                     <a:lstStyle/>
                     <a:p>
                       <a:r>
-                        <a:rPr sz="1000">
+                        <a:rPr sz="1200">
                           <a:solidFill>
                             <a:srgbClr val="3D424E"/>
                           </a:solidFill>
@@ -7537,7 +7537,7 @@
                     <a:lstStyle/>
                     <a:p>
                       <a:r>
-                        <a:rPr sz="1000">
+                        <a:rPr sz="1200">
                           <a:solidFill>
                             <a:srgbClr val="3D424E"/>
                           </a:solidFill>
@@ -7554,7 +7554,7 @@
                     <a:lstStyle/>
                     <a:p>
                       <a:r>
-                        <a:rPr sz="1000">
+                        <a:rPr sz="1200">
                           <a:solidFill>
                             <a:srgbClr val="3D424E"/>
                           </a:solidFill>
@@ -7571,7 +7571,7 @@
                     <a:lstStyle/>
                     <a:p>
                       <a:r>
-                        <a:rPr sz="1000">
+                        <a:rPr sz="1200">
                           <a:solidFill>
                             <a:srgbClr val="3D424E"/>
                           </a:solidFill>
@@ -7590,7 +7590,7 @@
                     <a:lstStyle/>
                     <a:p>
                       <a:r>
-                        <a:rPr sz="1000">
+                        <a:rPr sz="1200">
                           <a:solidFill>
                             <a:srgbClr val="3D424E"/>
                           </a:solidFill>
@@ -7607,7 +7607,7 @@
                     <a:lstStyle/>
                     <a:p>
                       <a:r>
-                        <a:rPr sz="1000">
+                        <a:rPr sz="1200">
                           <a:solidFill>
                             <a:srgbClr val="3D424E"/>
                           </a:solidFill>
@@ -7624,7 +7624,7 @@
                     <a:lstStyle/>
                     <a:p>
                       <a:r>
-                        <a:rPr sz="1000">
+                        <a:rPr sz="1200">
                           <a:solidFill>
                             <a:srgbClr val="3D424E"/>
                           </a:solidFill>
@@ -7643,7 +7643,7 @@
                     <a:lstStyle/>
                     <a:p>
                       <a:r>
-                        <a:rPr sz="1000">
+                        <a:rPr sz="1200">
                           <a:solidFill>
                             <a:srgbClr val="3D424E"/>
                           </a:solidFill>
@@ -7660,7 +7660,7 @@
                     <a:lstStyle/>
                     <a:p>
                       <a:r>
-                        <a:rPr sz="1000">
+                        <a:rPr sz="1200">
                           <a:solidFill>
                             <a:srgbClr val="3D424E"/>
                           </a:solidFill>
@@ -7677,7 +7677,7 @@
                     <a:lstStyle/>
                     <a:p>
                       <a:r>
-                        <a:rPr sz="1000">
+                        <a:rPr sz="1200">
                           <a:solidFill>
                             <a:srgbClr val="3D424E"/>
                           </a:solidFill>
@@ -7696,7 +7696,7 @@
                     <a:lstStyle/>
                     <a:p>
                       <a:r>
-                        <a:rPr sz="1000">
+                        <a:rPr sz="1200">
                           <a:solidFill>
                             <a:srgbClr val="3D424E"/>
                           </a:solidFill>
@@ -7713,7 +7713,7 @@
                     <a:lstStyle/>
                     <a:p>
                       <a:r>
-                        <a:rPr sz="1000">
+                        <a:rPr sz="1200">
                           <a:solidFill>
                             <a:srgbClr val="3D424E"/>
                           </a:solidFill>
@@ -7730,7 +7730,7 @@
                     <a:lstStyle/>
                     <a:p>
                       <a:r>
-                        <a:rPr sz="1000">
+                        <a:rPr sz="1200">
                           <a:solidFill>
                             <a:srgbClr val="3D424E"/>
                           </a:solidFill>
@@ -7749,7 +7749,7 @@
                     <a:lstStyle/>
                     <a:p>
                       <a:r>
-                        <a:rPr sz="1000">
+                        <a:rPr sz="1200">
                           <a:solidFill>
                             <a:srgbClr val="3D424E"/>
                           </a:solidFill>
@@ -7766,7 +7766,7 @@
                     <a:lstStyle/>
                     <a:p>
                       <a:r>
-                        <a:rPr sz="1000">
+                        <a:rPr sz="1200">
                           <a:solidFill>
                             <a:srgbClr val="3D424E"/>
                           </a:solidFill>
@@ -7783,7 +7783,7 @@
                     <a:lstStyle/>
                     <a:p>
                       <a:r>
-                        <a:rPr sz="1000">
+                        <a:rPr sz="1200">
                           <a:solidFill>
                             <a:srgbClr val="3D424E"/>
                           </a:solidFill>
@@ -7802,7 +7802,7 @@
                     <a:lstStyle/>
                     <a:p>
                       <a:r>
-                        <a:rPr sz="1000">
+                        <a:rPr sz="1200">
                           <a:solidFill>
                             <a:srgbClr val="3D424E"/>
                           </a:solidFill>
@@ -7819,7 +7819,7 @@
                     <a:lstStyle/>
                     <a:p>
                       <a:r>
-                        <a:rPr sz="1000">
+                        <a:rPr sz="1200">
                           <a:solidFill>
                             <a:srgbClr val="3D424E"/>
                           </a:solidFill>
@@ -7836,7 +7836,7 @@
                     <a:lstStyle/>
                     <a:p>
                       <a:r>
-                        <a:rPr sz="1000">
+                        <a:rPr sz="1200">
                           <a:solidFill>
                             <a:srgbClr val="3D424E"/>
                           </a:solidFill>
@@ -7855,7 +7855,7 @@
                     <a:lstStyle/>
                     <a:p>
                       <a:r>
-                        <a:rPr sz="1000">
+                        <a:rPr sz="1200">
                           <a:solidFill>
                             <a:srgbClr val="3D424E"/>
                           </a:solidFill>
@@ -7876,7 +7876,7 @@
                     <a:lstStyle/>
                     <a:p>
                       <a:r>
-                        <a:rPr sz="1000">
+                        <a:rPr sz="1200">
                           <a:solidFill>
                             <a:srgbClr val="3D424E"/>
                           </a:solidFill>
@@ -7897,7 +7897,7 @@
                     <a:lstStyle/>
                     <a:p>
                       <a:r>
-                        <a:rPr sz="1000">
+                        <a:rPr sz="1200">
                           <a:solidFill>
                             <a:srgbClr val="3D424E"/>
                           </a:solidFill>
@@ -8013,8 +8013,8 @@
         </p:nvSpPr>
         <p:spPr>
           <a:xfrm>
-            <a:off x="457200" y="320040"/>
-            <a:ext cx="11430000" cy="822960"/>
+            <a:off x="457200" y="274320"/>
+            <a:ext cx="11430000" cy="914400"/>
           </a:xfrm>
           <a:prstGeom prst="rect">
             <a:avLst/>
@@ -8028,7 +8028,7 @@
           <a:lstStyle/>
           <a:p>
             <a:pPr>
-              <a:defRPr sz="2600" b="1">
+              <a:defRPr sz="2800" b="1">
                 <a:solidFill>
                   <a:srgbClr val="1F2A4E"/>
                 </a:solidFill>
@@ -8249,7 +8249,7 @@
         </p:nvSpPr>
         <p:spPr>
           <a:xfrm>
-            <a:off x="6231636" y="1554480"/>
+            <a:off x="653796" y="2651760"/>
             <a:ext cx="822960" cy="960120"/>
           </a:xfrm>
           <a:prstGeom prst="roundRect">
@@ -8292,7 +8292,7 @@
         </p:nvSpPr>
         <p:spPr>
           <a:xfrm>
-            <a:off x="6231636" y="1554480"/>
+            <a:off x="653796" y="2651760"/>
             <a:ext cx="822960" cy="960120"/>
           </a:xfrm>
           <a:prstGeom prst="rect">
@@ -8327,7 +8327,7 @@
         </p:nvSpPr>
         <p:spPr>
           <a:xfrm>
-            <a:off x="7100316" y="1554480"/>
+            <a:off x="1522476" y="2651760"/>
             <a:ext cx="4434840" cy="960120"/>
           </a:xfrm>
           <a:prstGeom prst="roundRect">
@@ -8372,7 +8372,7 @@
         </p:nvSpPr>
         <p:spPr>
           <a:xfrm>
-            <a:off x="7237476" y="1554480"/>
+            <a:off x="1659636" y="2651760"/>
             <a:ext cx="4297679" cy="960120"/>
           </a:xfrm>
           <a:prstGeom prst="rect">
@@ -8407,7 +8407,7 @@
         </p:nvSpPr>
         <p:spPr>
           <a:xfrm>
-            <a:off x="653796" y="2651760"/>
+            <a:off x="653796" y="3749039"/>
             <a:ext cx="822960" cy="960120"/>
           </a:xfrm>
           <a:prstGeom prst="roundRect">
@@ -8450,7 +8450,7 @@
         </p:nvSpPr>
         <p:spPr>
           <a:xfrm>
-            <a:off x="653796" y="2651760"/>
+            <a:off x="653796" y="3749039"/>
             <a:ext cx="822960" cy="960120"/>
           </a:xfrm>
           <a:prstGeom prst="rect">
@@ -8485,7 +8485,7 @@
         </p:nvSpPr>
         <p:spPr>
           <a:xfrm>
-            <a:off x="1522476" y="2651760"/>
+            <a:off x="1522476" y="3749039"/>
             <a:ext cx="4434840" cy="960120"/>
           </a:xfrm>
           <a:prstGeom prst="roundRect">
@@ -8530,7 +8530,7 @@
         </p:nvSpPr>
         <p:spPr>
           <a:xfrm>
-            <a:off x="1659636" y="2651760"/>
+            <a:off x="1659636" y="3749039"/>
             <a:ext cx="4297679" cy="960120"/>
           </a:xfrm>
           <a:prstGeom prst="rect">
@@ -8565,7 +8565,7 @@
         </p:nvSpPr>
         <p:spPr>
           <a:xfrm>
-            <a:off x="6231636" y="2651760"/>
+            <a:off x="653796" y="4846320"/>
             <a:ext cx="822960" cy="960120"/>
           </a:xfrm>
           <a:prstGeom prst="roundRect">
@@ -8608,7 +8608,7 @@
         </p:nvSpPr>
         <p:spPr>
           <a:xfrm>
-            <a:off x="6231636" y="2651760"/>
+            <a:off x="653796" y="4846320"/>
             <a:ext cx="822960" cy="960120"/>
           </a:xfrm>
           <a:prstGeom prst="rect">
@@ -8643,7 +8643,7 @@
         </p:nvSpPr>
         <p:spPr>
           <a:xfrm>
-            <a:off x="7100316" y="2651760"/>
+            <a:off x="1522476" y="4846320"/>
             <a:ext cx="4434840" cy="960120"/>
           </a:xfrm>
           <a:prstGeom prst="roundRect">
@@ -8688,7 +8688,7 @@
         </p:nvSpPr>
         <p:spPr>
           <a:xfrm>
-            <a:off x="7237476" y="2651760"/>
+            <a:off x="1659636" y="4846320"/>
             <a:ext cx="4297679" cy="960120"/>
           </a:xfrm>
           <a:prstGeom prst="rect">
@@ -8723,7 +8723,7 @@
         </p:nvSpPr>
         <p:spPr>
           <a:xfrm>
-            <a:off x="653796" y="3749039"/>
+            <a:off x="6231636" y="1554480"/>
             <a:ext cx="822960" cy="960120"/>
           </a:xfrm>
           <a:prstGeom prst="roundRect">
@@ -8766,7 +8766,7 @@
         </p:nvSpPr>
         <p:spPr>
           <a:xfrm>
-            <a:off x="653796" y="3749039"/>
+            <a:off x="6231636" y="1554480"/>
             <a:ext cx="822960" cy="960120"/>
           </a:xfrm>
           <a:prstGeom prst="rect">
@@ -8801,7 +8801,7 @@
         </p:nvSpPr>
         <p:spPr>
           <a:xfrm>
-            <a:off x="1522476" y="3749039"/>
+            <a:off x="7100316" y="1554480"/>
             <a:ext cx="4434840" cy="960120"/>
           </a:xfrm>
           <a:prstGeom prst="roundRect">
@@ -8846,7 +8846,7 @@
         </p:nvSpPr>
         <p:spPr>
           <a:xfrm>
-            <a:off x="1659636" y="3749039"/>
+            <a:off x="7237476" y="1554480"/>
             <a:ext cx="4297679" cy="960120"/>
           </a:xfrm>
           <a:prstGeom prst="rect">
@@ -8881,7 +8881,7 @@
         </p:nvSpPr>
         <p:spPr>
           <a:xfrm>
-            <a:off x="6231636" y="3749039"/>
+            <a:off x="6231636" y="2651760"/>
             <a:ext cx="822960" cy="960120"/>
           </a:xfrm>
           <a:prstGeom prst="roundRect">
@@ -8924,7 +8924,7 @@
         </p:nvSpPr>
         <p:spPr>
           <a:xfrm>
-            <a:off x="6231636" y="3749039"/>
+            <a:off x="6231636" y="2651760"/>
             <a:ext cx="822960" cy="960120"/>
           </a:xfrm>
           <a:prstGeom prst="rect">
@@ -8959,7 +8959,7 @@
         </p:nvSpPr>
         <p:spPr>
           <a:xfrm>
-            <a:off x="7100316" y="3749039"/>
+            <a:off x="7100316" y="2651760"/>
             <a:ext cx="4434840" cy="960120"/>
           </a:xfrm>
           <a:prstGeom prst="roundRect">
@@ -9004,7 +9004,7 @@
         </p:nvSpPr>
         <p:spPr>
           <a:xfrm>
-            <a:off x="7237476" y="3749039"/>
+            <a:off x="7237476" y="2651760"/>
             <a:ext cx="4297679" cy="960120"/>
           </a:xfrm>
           <a:prstGeom prst="rect">
@@ -9039,7 +9039,7 @@
         </p:nvSpPr>
         <p:spPr>
           <a:xfrm>
-            <a:off x="653796" y="4846320"/>
+            <a:off x="6231636" y="3749039"/>
             <a:ext cx="822960" cy="960120"/>
           </a:xfrm>
           <a:prstGeom prst="roundRect">
@@ -9082,7 +9082,7 @@
         </p:nvSpPr>
         <p:spPr>
           <a:xfrm>
-            <a:off x="653796" y="4846320"/>
+            <a:off x="6231636" y="3749039"/>
             <a:ext cx="822960" cy="960120"/>
           </a:xfrm>
           <a:prstGeom prst="rect">
@@ -9117,7 +9117,7 @@
         </p:nvSpPr>
         <p:spPr>
           <a:xfrm>
-            <a:off x="1522476" y="4846320"/>
+            <a:off x="7100316" y="3749039"/>
             <a:ext cx="4434840" cy="960120"/>
           </a:xfrm>
           <a:prstGeom prst="roundRect">
@@ -9162,7 +9162,7 @@
         </p:nvSpPr>
         <p:spPr>
           <a:xfrm>
-            <a:off x="1659636" y="4846320"/>
+            <a:off x="7237476" y="3749039"/>
             <a:ext cx="4297679" cy="960120"/>
           </a:xfrm>
           <a:prstGeom prst="rect">
@@ -9443,8 +9443,8 @@
         </p:nvSpPr>
         <p:spPr>
           <a:xfrm>
-            <a:off x="457200" y="320040"/>
-            <a:ext cx="11430000" cy="822960"/>
+            <a:off x="457200" y="274320"/>
+            <a:ext cx="11430000" cy="914400"/>
           </a:xfrm>
           <a:prstGeom prst="rect">
             <a:avLst/>
@@ -9458,7 +9458,7 @@
           <a:lstStyle/>
           <a:p>
             <a:pPr>
-              <a:defRPr sz="2600" b="1">
+              <a:defRPr sz="2800" b="1">
                 <a:solidFill>
                   <a:srgbClr val="1F2A4E"/>
                 </a:solidFill>
@@ -9560,7 +9560,7 @@
           <a:lstStyle/>
           <a:p>
             <a:pPr algn="ctr">
-              <a:defRPr sz="1100" i="1">
+              <a:defRPr sz="1300" i="1">
                 <a:solidFill>
                   <a:srgbClr val="707682"/>
                 </a:solidFill>
@@ -9668,8 +9668,8 @@
         </p:nvSpPr>
         <p:spPr>
           <a:xfrm>
-            <a:off x="457200" y="320040"/>
-            <a:ext cx="11430000" cy="822960"/>
+            <a:off x="457200" y="274320"/>
+            <a:ext cx="11430000" cy="914400"/>
           </a:xfrm>
           <a:prstGeom prst="rect">
             <a:avLst/>
@@ -9683,7 +9683,7 @@
           <a:lstStyle/>
           <a:p>
             <a:pPr>
-              <a:defRPr sz="2600" b="1">
+              <a:defRPr sz="2800" b="1">
                 <a:solidFill>
                   <a:srgbClr val="1F2A4E"/>
                 </a:solidFill>
@@ -9768,7 +9768,7 @@
                     <a:lstStyle/>
                     <a:p>
                       <a:r>
-                        <a:rPr sz="1300" b="1">
+                        <a:rPr sz="1500" b="1">
                           <a:solidFill>
                             <a:srgbClr val="FFFFFF"/>
                           </a:solidFill>
@@ -9789,7 +9789,7 @@
                     <a:lstStyle/>
                     <a:p>
                       <a:r>
-                        <a:rPr sz="1300" b="1">
+                        <a:rPr sz="1500" b="1">
                           <a:solidFill>
                             <a:srgbClr val="FFFFFF"/>
                           </a:solidFill>
@@ -9810,7 +9810,7 @@
                     <a:lstStyle/>
                     <a:p>
                       <a:r>
-                        <a:rPr sz="1300" b="1">
+                        <a:rPr sz="1500" b="1">
                           <a:solidFill>
                             <a:srgbClr val="FFFFFF"/>
                           </a:solidFill>
@@ -9833,7 +9833,7 @@
                     <a:lstStyle/>
                     <a:p>
                       <a:r>
-                        <a:rPr sz="1200">
+                        <a:rPr sz="1400">
                           <a:solidFill>
                             <a:srgbClr val="3D424E"/>
                           </a:solidFill>
@@ -9850,7 +9850,7 @@
                     <a:lstStyle/>
                     <a:p>
                       <a:r>
-                        <a:rPr sz="1200">
+                        <a:rPr sz="1400">
                           <a:solidFill>
                             <a:srgbClr val="3D424E"/>
                           </a:solidFill>
@@ -9867,7 +9867,7 @@
                     <a:lstStyle/>
                     <a:p>
                       <a:r>
-                        <a:rPr sz="1200">
+                        <a:rPr sz="1400">
                           <a:solidFill>
                             <a:srgbClr val="3D424E"/>
                           </a:solidFill>
@@ -9886,7 +9886,7 @@
                     <a:lstStyle/>
                     <a:p>
                       <a:r>
-                        <a:rPr sz="1200">
+                        <a:rPr sz="1400">
                           <a:solidFill>
                             <a:srgbClr val="3D424E"/>
                           </a:solidFill>
@@ -9907,7 +9907,7 @@
                     <a:lstStyle/>
                     <a:p>
                       <a:r>
-                        <a:rPr sz="1200">
+                        <a:rPr sz="1400">
                           <a:solidFill>
                             <a:srgbClr val="3D424E"/>
                           </a:solidFill>
@@ -9928,7 +9928,7 @@
                     <a:lstStyle/>
                     <a:p>
                       <a:r>
-                        <a:rPr sz="1200">
+                        <a:rPr sz="1400">
                           <a:solidFill>
                             <a:srgbClr val="3D424E"/>
                           </a:solidFill>
@@ -9951,7 +9951,7 @@
                     <a:lstStyle/>
                     <a:p>
                       <a:r>
-                        <a:rPr sz="1200">
+                        <a:rPr sz="1400">
                           <a:solidFill>
                             <a:srgbClr val="3D424E"/>
                           </a:solidFill>
@@ -9968,7 +9968,7 @@
                     <a:lstStyle/>
                     <a:p>
                       <a:r>
-                        <a:rPr sz="1200">
+                        <a:rPr sz="1400">
                           <a:solidFill>
                             <a:srgbClr val="3D424E"/>
                           </a:solidFill>
@@ -9985,7 +9985,7 @@
                     <a:lstStyle/>
                     <a:p>
                       <a:r>
-                        <a:rPr sz="1200">
+                        <a:rPr sz="1400">
                           <a:solidFill>
                             <a:srgbClr val="3D424E"/>
                           </a:solidFill>
@@ -10097,8 +10097,8 @@
         </p:nvSpPr>
         <p:spPr>
           <a:xfrm>
-            <a:off x="457200" y="320040"/>
-            <a:ext cx="11430000" cy="822960"/>
+            <a:off x="457200" y="274320"/>
+            <a:ext cx="11430000" cy="914400"/>
           </a:xfrm>
           <a:prstGeom prst="rect">
             <a:avLst/>
@@ -10112,7 +10112,7 @@
           <a:lstStyle/>
           <a:p>
             <a:pPr>
-              <a:defRPr sz="2600" b="1">
+              <a:defRPr sz="2800" b="1">
                 <a:solidFill>
                   <a:srgbClr val="1F2A4E"/>
                 </a:solidFill>
@@ -10175,7 +10175,7 @@
         </p:nvSpPr>
         <p:spPr>
           <a:xfrm>
-            <a:off x="457200" y="1371600"/>
+            <a:off x="457200" y="1417320"/>
             <a:ext cx="11430000" cy="4937760"/>
           </a:xfrm>
           <a:prstGeom prst="rect">
@@ -10191,11 +10191,11 @@
           <a:p>
             <a:pPr>
               <a:spcAft>
-                <a:spcPts val="600"/>
+                <a:spcPts val="1000"/>
               </a:spcAft>
             </a:pPr>
             <a:r>
-              <a:rPr sz="1500" b="1">
+              <a:rPr sz="1800" b="1">
                 <a:solidFill>
                   <a:srgbClr val="1F2A4E"/>
                 </a:solidFill>
@@ -10203,7 +10203,7 @@
               <a:t>Cenário A — apenas raça:  </a:t>
             </a:r>
             <a:r>
-              <a:rPr sz="1500">
+              <a:rPr sz="1800">
                 <a:solidFill>
                   <a:srgbClr val="3D424E"/>
                 </a:solidFill>
@@ -10214,11 +10214,11 @@
           <a:p>
             <a:pPr>
               <a:spcAft>
-                <a:spcPts val="600"/>
+                <a:spcPts val="1000"/>
               </a:spcAft>
             </a:pPr>
             <a:r>
-              <a:rPr sz="1500" b="1">
+              <a:rPr sz="1800" b="1">
                 <a:solidFill>
                   <a:srgbClr val="1F2A4E"/>
                 </a:solidFill>
@@ -10226,7 +10226,7 @@
               <a:t>Cenário B — raça × gênero:  </a:t>
             </a:r>
             <a:r>
-              <a:rPr sz="1500">
+              <a:rPr sz="1800">
                 <a:solidFill>
                   <a:srgbClr val="3D424E"/>
                 </a:solidFill>
@@ -10237,11 +10237,11 @@
           <a:p>
             <a:pPr>
               <a:spcAft>
-                <a:spcPts val="600"/>
+                <a:spcPts val="1000"/>
               </a:spcAft>
             </a:pPr>
             <a:r>
-              <a:rPr sz="1500" b="1">
+              <a:rPr sz="1800" b="1">
                 <a:solidFill>
                   <a:srgbClr val="1F2A4E"/>
                 </a:solidFill>
@@ -10249,7 +10249,7 @@
               <a:t>Norma seguida:  </a:t>
             </a:r>
             <a:r>
-              <a:rPr sz="1500">
+              <a:rPr sz="1800">
                 <a:solidFill>
                   <a:srgbClr val="3D424E"/>
                 </a:solidFill>
@@ -10260,11 +10260,11 @@
           <a:p>
             <a:pPr>
               <a:spcAft>
-                <a:spcPts val="600"/>
+                <a:spcPts val="1000"/>
               </a:spcAft>
             </a:pPr>
             <a:r>
-              <a:rPr sz="1500" b="1">
+              <a:rPr sz="1800" b="1">
                 <a:solidFill>
                   <a:srgbClr val="1F2A4E"/>
                 </a:solidFill>
@@ -10272,7 +10272,7 @@
               <a:t>Rigor experimental:  </a:t>
             </a:r>
             <a:r>
-              <a:rPr sz="1500">
+              <a:rPr sz="1800">
                 <a:solidFill>
                   <a:srgbClr val="3D424E"/>
                 </a:solidFill>
@@ -10283,11 +10283,11 @@
           <a:p>
             <a:pPr>
               <a:spcAft>
-                <a:spcPts val="600"/>
+                <a:spcPts val="1000"/>
               </a:spcAft>
             </a:pPr>
             <a:r>
-              <a:rPr sz="1500" b="1">
+              <a:rPr sz="1800" b="1">
                 <a:solidFill>
                   <a:srgbClr val="1F2A4E"/>
                 </a:solidFill>
@@ -10295,7 +10295,7 @@
               <a:t>Datasets de transferência (Etapa 5):  </a:t>
             </a:r>
             <a:r>
-              <a:rPr sz="1500">
+              <a:rPr sz="1800">
                 <a:solidFill>
                   <a:srgbClr val="3D424E"/>
                 </a:solidFill>
@@ -10401,8 +10401,8 @@
         </p:nvSpPr>
         <p:spPr>
           <a:xfrm>
-            <a:off x="457200" y="320040"/>
-            <a:ext cx="11430000" cy="822960"/>
+            <a:off x="457200" y="274320"/>
+            <a:ext cx="11430000" cy="914400"/>
           </a:xfrm>
           <a:prstGeom prst="rect">
             <a:avLst/>
@@ -10416,7 +10416,7 @@
           <a:lstStyle/>
           <a:p>
             <a:pPr>
-              <a:defRPr sz="2600" b="1">
+              <a:defRPr sz="2800" b="1">
                 <a:solidFill>
                   <a:srgbClr val="1F2A4E"/>
                 </a:solidFill>
@@ -10479,7 +10479,7 @@
         </p:nvSpPr>
         <p:spPr>
           <a:xfrm>
-            <a:off x="457200" y="1371600"/>
+            <a:off x="457200" y="1417320"/>
             <a:ext cx="11430000" cy="4937760"/>
           </a:xfrm>
           <a:prstGeom prst="rect">
@@ -10495,11 +10495,11 @@
           <a:p>
             <a:pPr>
               <a:spcAft>
-                <a:spcPts val="600"/>
+                <a:spcPts val="1000"/>
               </a:spcAft>
             </a:pPr>
             <a:r>
-              <a:rPr sz="1500" b="1">
+              <a:rPr sz="1800" b="1">
                 <a:solidFill>
                   <a:srgbClr val="1F2A4E"/>
                 </a:solidFill>
@@ -10507,7 +10507,7 @@
               <a:t>Por que triangular — Kleinberg et al. (2017):  </a:t>
             </a:r>
             <a:r>
-              <a:rPr sz="1500">
+              <a:rPr sz="1800">
                 <a:solidFill>
                   <a:srgbClr val="3D424E"/>
                 </a:solidFill>
@@ -10518,11 +10518,11 @@
           <a:p>
             <a:pPr>
               <a:spcAft>
-                <a:spcPts val="600"/>
+                <a:spcPts val="1000"/>
               </a:spcAft>
             </a:pPr>
             <a:r>
-              <a:rPr sz="1500" b="1">
+              <a:rPr sz="1800" b="1">
                 <a:solidFill>
                   <a:srgbClr val="1F2A4E"/>
                 </a:solidFill>
@@ -10530,7 +10530,7 @@
               <a:t>Disparity Ratio:  </a:t>
             </a:r>
             <a:r>
-              <a:rPr sz="1500">
+              <a:rPr sz="1800">
                 <a:solidFill>
                   <a:srgbClr val="3D424E"/>
                 </a:solidFill>
@@ -10541,11 +10541,11 @@
           <a:p>
             <a:pPr>
               <a:spcAft>
-                <a:spcPts val="600"/>
+                <a:spcPts val="1000"/>
               </a:spcAft>
             </a:pPr>
             <a:r>
-              <a:rPr sz="1500" b="1">
+              <a:rPr sz="1800" b="1">
                 <a:solidFill>
                   <a:srgbClr val="1F2A4E"/>
                 </a:solidFill>
@@ -10553,7 +10553,7 @@
               <a:t>F1 da pior classe:  </a:t>
             </a:r>
             <a:r>
-              <a:rPr sz="1500">
+              <a:rPr sz="1800">
                 <a:solidFill>
                   <a:srgbClr val="3D424E"/>
                 </a:solidFill>
@@ -10564,11 +10564,11 @@
           <a:p>
             <a:pPr>
               <a:spcAft>
-                <a:spcPts val="600"/>
+                <a:spcPts val="1000"/>
               </a:spcAft>
             </a:pPr>
             <a:r>
-              <a:rPr sz="1500" b="1">
+              <a:rPr sz="1800" b="1">
                 <a:solidFill>
                   <a:srgbClr val="1F2A4E"/>
                 </a:solidFill>
@@ -10576,7 +10576,7 @@
               <a:t>Equal Opportunity — Hardt et al. (2016, NeurIPS):  </a:t>
             </a:r>
             <a:r>
-              <a:rPr sz="1500">
+              <a:rPr sz="1800">
                 <a:solidFill>
                   <a:srgbClr val="3D424E"/>
                 </a:solidFill>
@@ -10587,11 +10587,11 @@
           <a:p>
             <a:pPr>
               <a:spcAft>
-                <a:spcPts val="600"/>
+                <a:spcPts val="1000"/>
               </a:spcAft>
             </a:pPr>
             <a:r>
-              <a:rPr sz="1500" b="1">
+              <a:rPr sz="1800" b="1">
                 <a:solidFill>
                   <a:srgbClr val="1F2A4E"/>
                 </a:solidFill>
@@ -10599,7 +10599,7 @@
               <a:t>Equalized Odds — Hardt et al. (2016):  </a:t>
             </a:r>
             <a:r>
-              <a:rPr sz="1500">
+              <a:rPr sz="1800">
                 <a:solidFill>
                   <a:srgbClr val="3D424E"/>
                 </a:solidFill>
@@ -10610,11 +10610,11 @@
           <a:p>
             <a:pPr>
               <a:spcAft>
-                <a:spcPts val="600"/>
+                <a:spcPts val="1000"/>
               </a:spcAft>
             </a:pPr>
             <a:r>
-              <a:rPr sz="1500" b="1">
+              <a:rPr sz="1800" b="1">
                 <a:solidFill>
                   <a:srgbClr val="1F2A4E"/>
                 </a:solidFill>
@@ -10622,7 +10622,7 @@
               <a:t>Visualização Pareto:  </a:t>
             </a:r>
             <a:r>
-              <a:rPr sz="1500">
+              <a:rPr sz="1800">
                 <a:solidFill>
                   <a:srgbClr val="3D424E"/>
                 </a:solidFill>
@@ -10728,8 +10728,8 @@
         </p:nvSpPr>
         <p:spPr>
           <a:xfrm>
-            <a:off x="457200" y="320040"/>
-            <a:ext cx="11430000" cy="822960"/>
+            <a:off x="457200" y="274320"/>
+            <a:ext cx="11430000" cy="914400"/>
           </a:xfrm>
           <a:prstGeom prst="rect">
             <a:avLst/>
@@ -10743,7 +10743,7 @@
           <a:lstStyle/>
           <a:p>
             <a:pPr>
-              <a:defRPr sz="2600" b="1">
+              <a:defRPr sz="2800" b="1">
                 <a:solidFill>
                   <a:srgbClr val="1F2A4E"/>
                 </a:solidFill>
@@ -10828,7 +10828,7 @@
                     <a:lstStyle/>
                     <a:p>
                       <a:r>
-                        <a:rPr sz="1300" b="1">
+                        <a:rPr sz="1500" b="1">
                           <a:solidFill>
                             <a:srgbClr val="FFFFFF"/>
                           </a:solidFill>
@@ -10849,7 +10849,7 @@
                     <a:lstStyle/>
                     <a:p>
                       <a:r>
-                        <a:rPr sz="1300" b="1">
+                        <a:rPr sz="1500" b="1">
                           <a:solidFill>
                             <a:srgbClr val="FFFFFF"/>
                           </a:solidFill>
@@ -10870,7 +10870,7 @@
                     <a:lstStyle/>
                     <a:p>
                       <a:r>
-                        <a:rPr sz="1300" b="1">
+                        <a:rPr sz="1500" b="1">
                           <a:solidFill>
                             <a:srgbClr val="FFFFFF"/>
                           </a:solidFill>
@@ -10893,7 +10893,7 @@
                     <a:lstStyle/>
                     <a:p>
                       <a:r>
-                        <a:rPr sz="1300">
+                        <a:rPr sz="1500">
                           <a:solidFill>
                             <a:srgbClr val="3D424E"/>
                           </a:solidFill>
@@ -10910,7 +10910,7 @@
                     <a:lstStyle/>
                     <a:p>
                       <a:r>
-                        <a:rPr sz="1300">
+                        <a:rPr sz="1500">
                           <a:solidFill>
                             <a:srgbClr val="3D424E"/>
                           </a:solidFill>
@@ -10927,7 +10927,7 @@
                     <a:lstStyle/>
                     <a:p>
                       <a:r>
-                        <a:rPr sz="1300">
+                        <a:rPr sz="1500">
                           <a:solidFill>
                             <a:srgbClr val="3D424E"/>
                           </a:solidFill>
@@ -10946,7 +10946,7 @@
                     <a:lstStyle/>
                     <a:p>
                       <a:r>
-                        <a:rPr sz="1300">
+                        <a:rPr sz="1500">
                           <a:solidFill>
                             <a:srgbClr val="3D424E"/>
                           </a:solidFill>
@@ -10963,7 +10963,7 @@
                     <a:lstStyle/>
                     <a:p>
                       <a:r>
-                        <a:rPr sz="1300">
+                        <a:rPr sz="1500">
                           <a:solidFill>
                             <a:srgbClr val="3D424E"/>
                           </a:solidFill>
@@ -10980,7 +10980,7 @@
                     <a:lstStyle/>
                     <a:p>
                       <a:r>
-                        <a:rPr sz="1300">
+                        <a:rPr sz="1500">
                           <a:solidFill>
                             <a:srgbClr val="3D424E"/>
                           </a:solidFill>
@@ -10999,7 +10999,7 @@
                     <a:lstStyle/>
                     <a:p>
                       <a:r>
-                        <a:rPr sz="1300">
+                        <a:rPr sz="1500">
                           <a:solidFill>
                             <a:srgbClr val="3D424E"/>
                           </a:solidFill>
@@ -11016,7 +11016,7 @@
                     <a:lstStyle/>
                     <a:p>
                       <a:r>
-                        <a:rPr sz="1300">
+                        <a:rPr sz="1500">
                           <a:solidFill>
                             <a:srgbClr val="3D424E"/>
                           </a:solidFill>
@@ -11033,7 +11033,7 @@
                     <a:lstStyle/>
                     <a:p>
                       <a:r>
-                        <a:rPr sz="1300">
+                        <a:rPr sz="1500">
                           <a:solidFill>
                             <a:srgbClr val="3D424E"/>
                           </a:solidFill>
@@ -11145,8 +11145,8 @@
         </p:nvSpPr>
         <p:spPr>
           <a:xfrm>
-            <a:off x="457200" y="320040"/>
-            <a:ext cx="11430000" cy="822960"/>
+            <a:off x="457200" y="274320"/>
+            <a:ext cx="11430000" cy="914400"/>
           </a:xfrm>
           <a:prstGeom prst="rect">
             <a:avLst/>
@@ -11160,7 +11160,7 @@
           <a:lstStyle/>
           <a:p>
             <a:pPr>
-              <a:defRPr sz="2600" b="1">
+              <a:defRPr sz="2800" b="1">
                 <a:solidFill>
                   <a:srgbClr val="1F2A4E"/>
                 </a:solidFill>
@@ -11245,7 +11245,7 @@
                     <a:lstStyle/>
                     <a:p>
                       <a:r>
-                        <a:rPr sz="1300" b="1">
+                        <a:rPr sz="1500" b="1">
                           <a:solidFill>
                             <a:srgbClr val="FFFFFF"/>
                           </a:solidFill>
@@ -11266,7 +11266,7 @@
                     <a:lstStyle/>
                     <a:p>
                       <a:r>
-                        <a:rPr sz="1300" b="1">
+                        <a:rPr sz="1500" b="1">
                           <a:solidFill>
                             <a:srgbClr val="FFFFFF"/>
                           </a:solidFill>
@@ -11287,7 +11287,7 @@
                     <a:lstStyle/>
                     <a:p>
                       <a:r>
-                        <a:rPr sz="1300" b="1">
+                        <a:rPr sz="1500" b="1">
                           <a:solidFill>
                             <a:srgbClr val="FFFFFF"/>
                           </a:solidFill>
@@ -11310,7 +11310,7 @@
                     <a:lstStyle/>
                     <a:p>
                       <a:r>
-                        <a:rPr sz="1100">
+                        <a:rPr sz="1300">
                           <a:solidFill>
                             <a:srgbClr val="3D424E"/>
                           </a:solidFill>
@@ -11331,7 +11331,7 @@
                     <a:lstStyle/>
                     <a:p>
                       <a:r>
-                        <a:rPr sz="1100">
+                        <a:rPr sz="1300">
                           <a:solidFill>
                             <a:srgbClr val="3D424E"/>
                           </a:solidFill>
@@ -11352,7 +11352,7 @@
                     <a:lstStyle/>
                     <a:p>
                       <a:r>
-                        <a:rPr sz="1100">
+                        <a:rPr sz="1300">
                           <a:solidFill>
                             <a:srgbClr val="3D424E"/>
                           </a:solidFill>
@@ -11375,7 +11375,7 @@
                     <a:lstStyle/>
                     <a:p>
                       <a:r>
-                        <a:rPr sz="1100">
+                        <a:rPr sz="1300">
                           <a:solidFill>
                             <a:srgbClr val="3D424E"/>
                           </a:solidFill>
@@ -11396,7 +11396,7 @@
                     <a:lstStyle/>
                     <a:p>
                       <a:r>
-                        <a:rPr sz="1100">
+                        <a:rPr sz="1300">
                           <a:solidFill>
                             <a:srgbClr val="3D424E"/>
                           </a:solidFill>
@@ -11417,7 +11417,7 @@
                     <a:lstStyle/>
                     <a:p>
                       <a:r>
-                        <a:rPr sz="1100">
+                        <a:rPr sz="1300">
                           <a:solidFill>
                             <a:srgbClr val="3D424E"/>
                           </a:solidFill>
@@ -11440,7 +11440,7 @@
                     <a:lstStyle/>
                     <a:p>
                       <a:r>
-                        <a:rPr sz="1100">
+                        <a:rPr sz="1300">
                           <a:solidFill>
                             <a:srgbClr val="3D424E"/>
                           </a:solidFill>
@@ -11457,7 +11457,7 @@
                     <a:lstStyle/>
                     <a:p>
                       <a:r>
-                        <a:rPr sz="1100">
+                        <a:rPr sz="1300">
                           <a:solidFill>
                             <a:srgbClr val="3D424E"/>
                           </a:solidFill>
@@ -11474,7 +11474,7 @@
                     <a:lstStyle/>
                     <a:p>
                       <a:r>
-                        <a:rPr sz="1100">
+                        <a:rPr sz="1300">
                           <a:solidFill>
                             <a:srgbClr val="3D424E"/>
                           </a:solidFill>
@@ -11493,7 +11493,7 @@
                     <a:lstStyle/>
                     <a:p>
                       <a:r>
-                        <a:rPr sz="1100">
+                        <a:rPr sz="1300">
                           <a:solidFill>
                             <a:srgbClr val="3D424E"/>
                           </a:solidFill>
@@ -11510,7 +11510,7 @@
                     <a:lstStyle/>
                     <a:p>
                       <a:r>
-                        <a:rPr sz="1100">
+                        <a:rPr sz="1300">
                           <a:solidFill>
                             <a:srgbClr val="3D424E"/>
                           </a:solidFill>
@@ -11527,7 +11527,7 @@
                     <a:lstStyle/>
                     <a:p>
                       <a:r>
-                        <a:rPr sz="1100">
+                        <a:rPr sz="1300">
                           <a:solidFill>
                             <a:srgbClr val="3D424E"/>
                           </a:solidFill>
@@ -11546,7 +11546,7 @@
                     <a:lstStyle/>
                     <a:p>
                       <a:r>
-                        <a:rPr sz="1100">
+                        <a:rPr sz="1300">
                           <a:solidFill>
                             <a:srgbClr val="3D424E"/>
                           </a:solidFill>
@@ -11563,7 +11563,7 @@
                     <a:lstStyle/>
                     <a:p>
                       <a:r>
-                        <a:rPr sz="1100">
+                        <a:rPr sz="1300">
                           <a:solidFill>
                             <a:srgbClr val="3D424E"/>
                           </a:solidFill>
@@ -11580,7 +11580,7 @@
                     <a:lstStyle/>
                     <a:p>
                       <a:r>
-                        <a:rPr sz="1100">
+                        <a:rPr sz="1300">
                           <a:solidFill>
                             <a:srgbClr val="3D424E"/>
                           </a:solidFill>
@@ -11599,7 +11599,7 @@
                     <a:lstStyle/>
                     <a:p>
                       <a:r>
-                        <a:rPr sz="1100">
+                        <a:rPr sz="1300">
                           <a:solidFill>
                             <a:srgbClr val="3D424E"/>
                           </a:solidFill>
@@ -11616,7 +11616,7 @@
                     <a:lstStyle/>
                     <a:p>
                       <a:r>
-                        <a:rPr sz="1100">
+                        <a:rPr sz="1300">
                           <a:solidFill>
                             <a:srgbClr val="3D424E"/>
                           </a:solidFill>
@@ -11633,7 +11633,7 @@
                     <a:lstStyle/>
                     <a:p>
                       <a:r>
-                        <a:rPr sz="1100">
+                        <a:rPr sz="1300">
                           <a:solidFill>
                             <a:srgbClr val="3D424E"/>
                           </a:solidFill>
@@ -11652,7 +11652,7 @@
                     <a:lstStyle/>
                     <a:p>
                       <a:r>
-                        <a:rPr sz="1100">
+                        <a:rPr sz="1300">
                           <a:solidFill>
                             <a:srgbClr val="3D424E"/>
                           </a:solidFill>
@@ -11669,7 +11669,7 @@
                     <a:lstStyle/>
                     <a:p>
                       <a:r>
-                        <a:rPr sz="1100">
+                        <a:rPr sz="1300">
                           <a:solidFill>
                             <a:srgbClr val="3D424E"/>
                           </a:solidFill>
@@ -11686,7 +11686,7 @@
                     <a:lstStyle/>
                     <a:p>
                       <a:r>
-                        <a:rPr sz="1100">
+                        <a:rPr sz="1300">
                           <a:solidFill>
                             <a:srgbClr val="3D424E"/>
                           </a:solidFill>
@@ -11705,7 +11705,7 @@
                     <a:lstStyle/>
                     <a:p>
                       <a:r>
-                        <a:rPr sz="1100">
+                        <a:rPr sz="1300">
                           <a:solidFill>
                             <a:srgbClr val="3D424E"/>
                           </a:solidFill>
@@ -11722,7 +11722,7 @@
                     <a:lstStyle/>
                     <a:p>
                       <a:r>
-                        <a:rPr sz="1100">
+                        <a:rPr sz="1300">
                           <a:solidFill>
                             <a:srgbClr val="3D424E"/>
                           </a:solidFill>
@@ -11739,7 +11739,7 @@
                     <a:lstStyle/>
                     <a:p>
                       <a:r>
-                        <a:rPr sz="1100">
+                        <a:rPr sz="1300">
                           <a:solidFill>
                             <a:srgbClr val="3D424E"/>
                           </a:solidFill>
@@ -11758,7 +11758,7 @@
                     <a:lstStyle/>
                     <a:p>
                       <a:r>
-                        <a:rPr sz="1100">
+                        <a:rPr sz="1300">
                           <a:solidFill>
                             <a:srgbClr val="3D424E"/>
                           </a:solidFill>
@@ -11775,7 +11775,7 @@
                     <a:lstStyle/>
                     <a:p>
                       <a:r>
-                        <a:rPr sz="1100">
+                        <a:rPr sz="1300">
                           <a:solidFill>
                             <a:srgbClr val="3D424E"/>
                           </a:solidFill>
@@ -11792,7 +11792,7 @@
                     <a:lstStyle/>
                     <a:p>
                       <a:r>
-                        <a:rPr sz="1100">
+                        <a:rPr sz="1300">
                           <a:solidFill>
                             <a:srgbClr val="3D424E"/>
                           </a:solidFill>
@@ -11811,7 +11811,7 @@
                     <a:lstStyle/>
                     <a:p>
                       <a:r>
-                        <a:rPr sz="1100">
+                        <a:rPr sz="1300">
                           <a:solidFill>
                             <a:srgbClr val="3D424E"/>
                           </a:solidFill>
@@ -11832,7 +11832,7 @@
                     <a:lstStyle/>
                     <a:p>
                       <a:r>
-                        <a:rPr sz="1100">
+                        <a:rPr sz="1300">
                           <a:solidFill>
                             <a:srgbClr val="3D424E"/>
                           </a:solidFill>
@@ -11853,7 +11853,7 @@
                     <a:lstStyle/>
                     <a:p>
                       <a:r>
-                        <a:rPr sz="1100">
+                        <a:rPr sz="1300">
                           <a:solidFill>
                             <a:srgbClr val="3D424E"/>
                           </a:solidFill>
@@ -11969,8 +11969,8 @@
         </p:nvSpPr>
         <p:spPr>
           <a:xfrm>
-            <a:off x="457200" y="320040"/>
-            <a:ext cx="11430000" cy="822960"/>
+            <a:off x="457200" y="274320"/>
+            <a:ext cx="11430000" cy="914400"/>
           </a:xfrm>
           <a:prstGeom prst="rect">
             <a:avLst/>
@@ -11984,7 +11984,7 @@
           <a:lstStyle/>
           <a:p>
             <a:pPr>
-              <a:defRPr sz="2600" b="1">
+              <a:defRPr sz="2800" b="1">
                 <a:solidFill>
                   <a:srgbClr val="1F2A4E"/>
                 </a:solidFill>
@@ -12069,7 +12069,7 @@
                     <a:lstStyle/>
                     <a:p>
                       <a:r>
-                        <a:rPr sz="1300" b="1">
+                        <a:rPr sz="1500" b="1">
                           <a:solidFill>
                             <a:srgbClr val="FFFFFF"/>
                           </a:solidFill>
@@ -12090,7 +12090,7 @@
                     <a:lstStyle/>
                     <a:p>
                       <a:r>
-                        <a:rPr sz="1300" b="1">
+                        <a:rPr sz="1500" b="1">
                           <a:solidFill>
                             <a:srgbClr val="FFFFFF"/>
                           </a:solidFill>
@@ -12111,7 +12111,7 @@
                     <a:lstStyle/>
                     <a:p>
                       <a:r>
-                        <a:rPr sz="1300" b="1">
+                        <a:rPr sz="1500" b="1">
                           <a:solidFill>
                             <a:srgbClr val="FFFFFF"/>
                           </a:solidFill>
@@ -12134,7 +12134,7 @@
                     <a:lstStyle/>
                     <a:p>
                       <a:r>
-                        <a:rPr sz="1200">
+                        <a:rPr sz="1400">
                           <a:solidFill>
                             <a:srgbClr val="3D424E"/>
                           </a:solidFill>
@@ -12151,7 +12151,7 @@
                     <a:lstStyle/>
                     <a:p>
                       <a:r>
-                        <a:rPr sz="1200">
+                        <a:rPr sz="1400">
                           <a:solidFill>
                             <a:srgbClr val="3D424E"/>
                           </a:solidFill>
@@ -12168,7 +12168,7 @@
                     <a:lstStyle/>
                     <a:p>
                       <a:r>
-                        <a:rPr sz="1200">
+                        <a:rPr sz="1400">
                           <a:solidFill>
                             <a:srgbClr val="3D424E"/>
                           </a:solidFill>
@@ -12187,7 +12187,7 @@
                     <a:lstStyle/>
                     <a:p>
                       <a:r>
-                        <a:rPr sz="1200">
+                        <a:rPr sz="1400">
                           <a:solidFill>
                             <a:srgbClr val="3D424E"/>
                           </a:solidFill>
@@ -12208,7 +12208,7 @@
                     <a:lstStyle/>
                     <a:p>
                       <a:r>
-                        <a:rPr sz="1200">
+                        <a:rPr sz="1400">
                           <a:solidFill>
                             <a:srgbClr val="3D424E"/>
                           </a:solidFill>
@@ -12229,7 +12229,7 @@
                     <a:lstStyle/>
                     <a:p>
                       <a:r>
-                        <a:rPr sz="1200">
+                        <a:rPr sz="1400">
                           <a:solidFill>
                             <a:srgbClr val="3D424E"/>
                           </a:solidFill>
@@ -12252,7 +12252,7 @@
                     <a:lstStyle/>
                     <a:p>
                       <a:r>
-                        <a:rPr sz="1200">
+                        <a:rPr sz="1400">
                           <a:solidFill>
                             <a:srgbClr val="3D424E"/>
                           </a:solidFill>
@@ -12269,7 +12269,7 @@
                     <a:lstStyle/>
                     <a:p>
                       <a:r>
-                        <a:rPr sz="1200">
+                        <a:rPr sz="1400">
                           <a:solidFill>
                             <a:srgbClr val="3D424E"/>
                           </a:solidFill>
@@ -12286,7 +12286,7 @@
                     <a:lstStyle/>
                     <a:p>
                       <a:r>
-                        <a:rPr sz="1200">
+                        <a:rPr sz="1400">
                           <a:solidFill>
                             <a:srgbClr val="3D424E"/>
                           </a:solidFill>
@@ -12305,7 +12305,7 @@
                     <a:lstStyle/>
                     <a:p>
                       <a:r>
-                        <a:rPr sz="1200">
+                        <a:rPr sz="1400">
                           <a:solidFill>
                             <a:srgbClr val="3D424E"/>
                           </a:solidFill>
@@ -12322,7 +12322,7 @@
                     <a:lstStyle/>
                     <a:p>
                       <a:r>
-                        <a:rPr sz="1200">
+                        <a:rPr sz="1400">
                           <a:solidFill>
                             <a:srgbClr val="3D424E"/>
                           </a:solidFill>
@@ -12339,7 +12339,7 @@
                     <a:lstStyle/>
                     <a:p>
                       <a:r>
-                        <a:rPr sz="1200">
+                        <a:rPr sz="1400">
                           <a:solidFill>
                             <a:srgbClr val="3D424E"/>
                           </a:solidFill>
@@ -12451,8 +12451,8 @@
         </p:nvSpPr>
         <p:spPr>
           <a:xfrm>
-            <a:off x="457200" y="320040"/>
-            <a:ext cx="11430000" cy="822960"/>
+            <a:off x="457200" y="274320"/>
+            <a:ext cx="11430000" cy="914400"/>
           </a:xfrm>
           <a:prstGeom prst="rect">
             <a:avLst/>
@@ -12466,7 +12466,7 @@
           <a:lstStyle/>
           <a:p>
             <a:pPr>
-              <a:defRPr sz="2600" b="1">
+              <a:defRPr sz="2800" b="1">
                 <a:solidFill>
                   <a:srgbClr val="1F2A4E"/>
                 </a:solidFill>
@@ -13028,7 +13028,7 @@
               </a:spcAft>
             </a:pPr>
             <a:r>
-              <a:rPr sz="1300" b="1">
+              <a:rPr sz="1500" b="1">
                 <a:solidFill>
                   <a:srgbClr val="1F2A4E"/>
                 </a:solidFill>
@@ -13036,7 +13036,7 @@
               <a:t>•  Etapas 1 e 2 (código completo):  </a:t>
             </a:r>
             <a:r>
-              <a:rPr sz="1300">
+              <a:rPr sz="1500">
                 <a:solidFill>
                   <a:srgbClr val="3D424E"/>
                 </a:solidFill>
@@ -13051,7 +13051,7 @@
               </a:spcAft>
             </a:pPr>
             <a:r>
-              <a:rPr sz="1300" b="1">
+              <a:rPr sz="1500" b="1">
                 <a:solidFill>
                   <a:srgbClr val="1F2A4E"/>
                 </a:solidFill>
@@ -13059,7 +13059,7 @@
               <a:t>•  Etapa 3 (FiLM):  </a:t>
             </a:r>
             <a:r>
-              <a:rPr sz="1300">
+              <a:rPr sz="1500">
                 <a:solidFill>
                   <a:srgbClr val="3D424E"/>
                 </a:solidFill>
@@ -13074,7 +13074,7 @@
               </a:spcAft>
             </a:pPr>
             <a:r>
-              <a:rPr sz="1300" b="1">
+              <a:rPr sz="1500" b="1">
                 <a:solidFill>
                   <a:srgbClr val="1F2A4E"/>
                 </a:solidFill>
@@ -13082,7 +13082,7 @@
               <a:t>•  Etapas 4, 5 e 6:  </a:t>
             </a:r>
             <a:r>
-              <a:rPr sz="1300">
+              <a:rPr sz="1500">
                 <a:solidFill>
                   <a:srgbClr val="3D424E"/>
                 </a:solidFill>
@@ -13097,7 +13097,7 @@
               </a:spcAft>
             </a:pPr>
             <a:r>
-              <a:rPr sz="1300" b="1">
+              <a:rPr sz="1500" b="1">
                 <a:solidFill>
                   <a:srgbClr val="1F2A4E"/>
                 </a:solidFill>
@@ -13105,7 +13105,7 @@
               <a:t>•  Texto da dissertação:  </a:t>
             </a:r>
             <a:r>
-              <a:rPr sz="1300">
+              <a:rPr sz="1500">
                 <a:solidFill>
                   <a:srgbClr val="3D424E"/>
                 </a:solidFill>
@@ -13211,8 +13211,8 @@
         </p:nvSpPr>
         <p:spPr>
           <a:xfrm>
-            <a:off x="457200" y="320040"/>
-            <a:ext cx="11430000" cy="822960"/>
+            <a:off x="457200" y="274320"/>
+            <a:ext cx="11430000" cy="914400"/>
           </a:xfrm>
           <a:prstGeom prst="rect">
             <a:avLst/>
@@ -13226,7 +13226,7 @@
           <a:lstStyle/>
           <a:p>
             <a:pPr>
-              <a:defRPr sz="2600" b="1">
+              <a:defRPr sz="2800" b="1">
                 <a:solidFill>
                   <a:srgbClr val="1F2A4E"/>
                 </a:solidFill>
@@ -13289,7 +13289,7 @@
         </p:nvSpPr>
         <p:spPr>
           <a:xfrm>
-            <a:off x="457200" y="1371600"/>
+            <a:off x="457200" y="1417320"/>
             <a:ext cx="11430000" cy="4937760"/>
           </a:xfrm>
           <a:prstGeom prst="rect">
@@ -13305,9 +13305,9 @@
           <a:p>
             <a:pPr>
               <a:spcAft>
-                <a:spcPts val="600"/>
+                <a:spcPts val="1000"/>
               </a:spcAft>
-              <a:defRPr sz="1500">
+              <a:defRPr sz="1800">
                 <a:solidFill>
                   <a:srgbClr val="3D424E"/>
                 </a:solidFill>
@@ -13320,9 +13320,9 @@
           <a:p>
             <a:pPr>
               <a:spcAft>
-                <a:spcPts val="600"/>
+                <a:spcPts val="1000"/>
               </a:spcAft>
-              <a:defRPr sz="1500">
+              <a:defRPr sz="1800">
                 <a:solidFill>
                   <a:srgbClr val="3D424E"/>
                 </a:solidFill>
@@ -13335,9 +13335,9 @@
           <a:p>
             <a:pPr>
               <a:spcAft>
-                <a:spcPts val="600"/>
+                <a:spcPts val="1000"/>
               </a:spcAft>
-              <a:defRPr sz="1500">
+              <a:defRPr sz="1800">
                 <a:solidFill>
                   <a:srgbClr val="3D424E"/>
                 </a:solidFill>
@@ -13350,11 +13350,11 @@
           <a:p>
             <a:pPr>
               <a:spcAft>
-                <a:spcPts val="600"/>
+                <a:spcPts val="1000"/>
               </a:spcAft>
             </a:pPr>
             <a:r>
-              <a:rPr sz="1500" b="1">
+              <a:rPr sz="1800" b="1">
                 <a:solidFill>
                   <a:srgbClr val="1F2A4E"/>
                 </a:solidFill>
@@ -13362,7 +13362,7 @@
               <a:t>A proposta agrega 3 vetores:  </a:t>
             </a:r>
             <a:r>
-              <a:rPr sz="1500">
+              <a:rPr sz="1800">
                 <a:solidFill>
                   <a:srgbClr val="3D424E"/>
                 </a:solidFill>
@@ -13373,11 +13373,11 @@
           <a:p>
             <a:pPr>
               <a:spcAft>
-                <a:spcPts val="600"/>
+                <a:spcPts val="1000"/>
               </a:spcAft>
             </a:pPr>
             <a:r>
-              <a:rPr sz="1500" b="1">
+              <a:rPr sz="1800" b="1">
                 <a:solidFill>
                   <a:srgbClr val="1F2A4E"/>
                 </a:solidFill>
@@ -13385,7 +13385,7 @@
               <a:t>Diferencial científico:  </a:t>
             </a:r>
             <a:r>
-              <a:rPr sz="1500">
+              <a:rPr sz="1800">
                 <a:solidFill>
                   <a:srgbClr val="3D424E"/>
                 </a:solidFill>
@@ -13634,8 +13634,8 @@
         </p:nvSpPr>
         <p:spPr>
           <a:xfrm>
-            <a:off x="457200" y="320040"/>
-            <a:ext cx="11430000" cy="822960"/>
+            <a:off x="457200" y="274320"/>
+            <a:ext cx="11430000" cy="914400"/>
           </a:xfrm>
           <a:prstGeom prst="rect">
             <a:avLst/>
@@ -13649,7 +13649,7 @@
           <a:lstStyle/>
           <a:p>
             <a:pPr>
-              <a:defRPr sz="2600" b="1">
+              <a:defRPr sz="2800" b="1">
                 <a:solidFill>
                   <a:srgbClr val="1F2A4E"/>
                 </a:solidFill>
@@ -14361,7 +14361,7 @@
               </a:spcAft>
             </a:pPr>
             <a:r>
-              <a:rPr sz="1300" b="1">
+              <a:rPr sz="1500" b="1">
                 <a:solidFill>
                   <a:srgbClr val="1F2A4E"/>
                 </a:solidFill>
@@ -14369,7 +14369,7 @@
               <a:t>NIST 2019 (Grother et al.): </a:t>
             </a:r>
             <a:r>
-              <a:rPr sz="1300">
+              <a:rPr sz="1500">
                 <a:solidFill>
                   <a:srgbClr val="3D424E"/>
                 </a:solidFill>
@@ -14384,7 +14384,7 @@
               </a:spcAft>
             </a:pPr>
             <a:r>
-              <a:rPr sz="1300" b="1">
+              <a:rPr sz="1500" b="1">
                 <a:solidFill>
                   <a:srgbClr val="1F2A4E"/>
                 </a:solidFill>
@@ -14392,7 +14392,7 @@
               <a:t>Gender Shades (Buolamwini &amp; Gebru, 2018): </a:t>
             </a:r>
             <a:r>
-              <a:rPr sz="1300">
+              <a:rPr sz="1500">
                 <a:solidFill>
                   <a:srgbClr val="3D424E"/>
                 </a:solidFill>
@@ -14407,7 +14407,7 @@
               </a:spcAft>
             </a:pPr>
             <a:r>
-              <a:rPr sz="1300" b="1">
+              <a:rPr sz="1500" b="1">
                 <a:solidFill>
                   <a:srgbClr val="1F2A4E"/>
                 </a:solidFill>
@@ -14415,7 +14415,7 @@
               <a:t>Conclusão: </a:t>
             </a:r>
             <a:r>
-              <a:rPr sz="1300">
+              <a:rPr sz="1500">
                 <a:solidFill>
                   <a:srgbClr val="3D424E"/>
                 </a:solidFill>
@@ -14521,8 +14521,8 @@
         </p:nvSpPr>
         <p:spPr>
           <a:xfrm>
-            <a:off x="457200" y="320040"/>
-            <a:ext cx="11430000" cy="822960"/>
+            <a:off x="457200" y="274320"/>
+            <a:ext cx="11430000" cy="914400"/>
           </a:xfrm>
           <a:prstGeom prst="rect">
             <a:avLst/>
@@ -14536,7 +14536,7 @@
           <a:lstStyle/>
           <a:p>
             <a:pPr>
-              <a:defRPr sz="2600" b="1">
+              <a:defRPr sz="2800" b="1">
                 <a:solidFill>
                   <a:srgbClr val="1F2A4E"/>
                 </a:solidFill>
@@ -15408,8 +15408,8 @@
         </p:nvSpPr>
         <p:spPr>
           <a:xfrm>
-            <a:off x="457200" y="320040"/>
-            <a:ext cx="11430000" cy="822960"/>
+            <a:off x="457200" y="274320"/>
+            <a:ext cx="11430000" cy="914400"/>
           </a:xfrm>
           <a:prstGeom prst="rect">
             <a:avLst/>
@@ -15423,7 +15423,7 @@
           <a:lstStyle/>
           <a:p>
             <a:pPr>
-              <a:defRPr sz="2600" b="1">
+              <a:defRPr sz="2800" b="1">
                 <a:solidFill>
                   <a:srgbClr val="1F2A4E"/>
                 </a:solidFill>
@@ -15525,7 +15525,7 @@
           <a:lstStyle/>
           <a:p>
             <a:pPr algn="ctr">
-              <a:defRPr sz="1100" i="1">
+              <a:defRPr sz="1300" i="1">
                 <a:solidFill>
                   <a:srgbClr val="707682"/>
                 </a:solidFill>
@@ -15633,8 +15633,8 @@
         </p:nvSpPr>
         <p:spPr>
           <a:xfrm>
-            <a:off x="457200" y="320040"/>
-            <a:ext cx="11430000" cy="822960"/>
+            <a:off x="457200" y="274320"/>
+            <a:ext cx="11430000" cy="914400"/>
           </a:xfrm>
           <a:prstGeom prst="rect">
             <a:avLst/>
@@ -15648,7 +15648,7 @@
           <a:lstStyle/>
           <a:p>
             <a:pPr>
-              <a:defRPr sz="2600" b="1">
+              <a:defRPr sz="2800" b="1">
                 <a:solidFill>
                   <a:srgbClr val="1F2A4E"/>
                 </a:solidFill>
@@ -15750,7 +15750,7 @@
           <a:lstStyle/>
           <a:p>
             <a:pPr algn="ctr">
-              <a:defRPr sz="1100" i="1">
+              <a:defRPr sz="1300" i="1">
                 <a:solidFill>
                   <a:srgbClr val="707682"/>
                 </a:solidFill>
@@ -15858,8 +15858,8 @@
         </p:nvSpPr>
         <p:spPr>
           <a:xfrm>
-            <a:off x="457200" y="320040"/>
-            <a:ext cx="11430000" cy="822960"/>
+            <a:off x="457200" y="274320"/>
+            <a:ext cx="11430000" cy="914400"/>
           </a:xfrm>
           <a:prstGeom prst="rect">
             <a:avLst/>
@@ -15873,7 +15873,7 @@
           <a:lstStyle/>
           <a:p>
             <a:pPr>
-              <a:defRPr sz="2600" b="1">
+              <a:defRPr sz="2800" b="1">
                 <a:solidFill>
                   <a:srgbClr val="1F2A4E"/>
                 </a:solidFill>
@@ -16015,7 +16015,7 @@
               </a:spcAft>
             </a:pPr>
             <a:r>
-              <a:rPr sz="1400" b="1">
+              <a:rPr sz="1600" b="1">
                 <a:solidFill>
                   <a:srgbClr val="1F2A4E"/>
                 </a:solidFill>
@@ -16023,7 +16023,7 @@
               <a:t>Rótulo monolítico:  </a:t>
             </a:r>
             <a:r>
-              <a:rPr sz="1400">
+              <a:rPr sz="1600">
                 <a:solidFill>
                   <a:srgbClr val="3D424E"/>
                 </a:solidFill>
@@ -16038,7 +16038,7 @@
               </a:spcAft>
             </a:pPr>
             <a:r>
-              <a:rPr sz="1400" b="1">
+              <a:rPr sz="1600" b="1">
                 <a:solidFill>
                   <a:srgbClr val="1F2A4E"/>
                 </a:solidFill>
@@ -16046,7 +16046,7 @@
               <a:t>Escala Monk (Ellis Monk, 2019):  </a:t>
             </a:r>
             <a:r>
-              <a:rPr sz="1400">
+              <a:rPr sz="1600">
                 <a:solidFill>
                   <a:srgbClr val="3D424E"/>
                 </a:solidFill>
@@ -16061,7 +16061,7 @@
               </a:spcAft>
             </a:pPr>
             <a:r>
-              <a:rPr sz="1400" b="1">
+              <a:rPr sz="1600" b="1">
                 <a:solidFill>
                   <a:srgbClr val="1F2A4E"/>
                 </a:solidFill>
@@ -16069,7 +16069,7 @@
               <a:t>Schumann et al. (2023):  </a:t>
             </a:r>
             <a:r>
-              <a:rPr sz="1400">
+              <a:rPr sz="1600">
                 <a:solidFill>
                   <a:srgbClr val="3D424E"/>
                 </a:solidFill>
@@ -16084,7 +16084,7 @@
               </a:spcAft>
             </a:pPr>
             <a:r>
-              <a:rPr sz="1400" b="1">
+              <a:rPr sz="1600" b="1">
                 <a:solidFill>
                   <a:srgbClr val="1F2A4E"/>
                 </a:solidFill>
@@ -16092,7 +16092,7 @@
               <a:t>Consequência:  </a:t>
             </a:r>
             <a:r>
-              <a:rPr sz="1400">
+              <a:rPr sz="1600">
                 <a:solidFill>
                   <a:srgbClr val="3D424E"/>
                 </a:solidFill>
@@ -16198,8 +16198,8 @@
         </p:nvSpPr>
         <p:spPr>
           <a:xfrm>
-            <a:off x="457200" y="320040"/>
-            <a:ext cx="11430000" cy="822960"/>
+            <a:off x="457200" y="274320"/>
+            <a:ext cx="11430000" cy="914400"/>
           </a:xfrm>
           <a:prstGeom prst="rect">
             <a:avLst/>
@@ -16213,7 +16213,7 @@
           <a:lstStyle/>
           <a:p>
             <a:pPr>
-              <a:defRPr sz="2600" b="1">
+              <a:defRPr sz="2800" b="1">
                 <a:solidFill>
                   <a:srgbClr val="1F2A4E"/>
                 </a:solidFill>
@@ -16419,7 +16419,7 @@
               </a:spcAft>
             </a:pPr>
             <a:r>
-              <a:rPr sz="1200" b="1">
+              <a:rPr sz="1400" b="1">
                 <a:solidFill>
                   <a:srgbClr val="C0392B"/>
                 </a:solidFill>
@@ -16427,7 +16427,7 @@
               <a:t>Pangelinan et al. (2023, FAccT):  </a:t>
             </a:r>
             <a:r>
-              <a:rPr sz="1200">
+              <a:rPr sz="1400">
                 <a:solidFill>
                   <a:srgbClr val="3D424E"/>
                 </a:solidFill>
@@ -16442,7 +16442,7 @@
               </a:spcAft>
             </a:pPr>
             <a:r>
-              <a:rPr sz="1200" b="1">
+              <a:rPr sz="1400" b="1">
                 <a:solidFill>
                   <a:srgbClr val="C0392B"/>
                 </a:solidFill>
@@ -16450,7 +16450,7 @@
               <a:t>Matias et al. (2026):  </a:t>
             </a:r>
             <a:r>
-              <a:rPr sz="1200">
+              <a:rPr sz="1400">
                 <a:solidFill>
                   <a:srgbClr val="3D424E"/>
                 </a:solidFill>
@@ -16465,7 +16465,7 @@
               </a:spcAft>
             </a:pPr>
             <a:r>
-              <a:rPr sz="1200" b="1">
+              <a:rPr sz="1400" b="1">
                 <a:solidFill>
                   <a:srgbClr val="C0392B"/>
                 </a:solidFill>
@@ -16473,7 +16473,7 @@
               <a:t>Implicação forte:  </a:t>
             </a:r>
             <a:r>
-              <a:rPr sz="1200">
+              <a:rPr sz="1400">
                 <a:solidFill>
                   <a:srgbClr val="3D424E"/>
                 </a:solidFill>
@@ -16634,7 +16634,7 @@
               </a:spcAft>
             </a:pPr>
             <a:r>
-              <a:rPr sz="1200" b="1">
+              <a:rPr sz="1400" b="1">
                 <a:solidFill>
                   <a:srgbClr val="1F2A4E"/>
                 </a:solidFill>
@@ -16642,7 +16642,7 @@
               <a:t>Tom de pele COMPLEMENTA, não substitui a raça:  </a:t>
             </a:r>
             <a:r>
-              <a:rPr sz="1200">
+              <a:rPr sz="1400">
                 <a:solidFill>
                   <a:srgbClr val="3D424E"/>
                 </a:solidFill>
@@ -16657,7 +16657,7 @@
               </a:spcAft>
             </a:pPr>
             <a:r>
-              <a:rPr sz="1200" b="1">
+              <a:rPr sz="1400" b="1">
                 <a:solidFill>
                   <a:srgbClr val="1F2A4E"/>
                 </a:solidFill>
@@ -16665,7 +16665,7 @@
               <a:t>Incorporamos a crítica formalmente:  </a:t>
             </a:r>
             <a:r>
-              <a:rPr sz="1200">
+              <a:rPr sz="1400">
                 <a:solidFill>
                   <a:srgbClr val="3D424E"/>
                 </a:solidFill>
@@ -16680,7 +16680,7 @@
               </a:spcAft>
             </a:pPr>
             <a:r>
-              <a:rPr sz="1200" b="1">
+              <a:rPr sz="1400" b="1">
                 <a:solidFill>
                   <a:srgbClr val="1F2A4E"/>
                 </a:solidFill>
@@ -16688,7 +16688,7 @@
               <a:t>Controle explícito de pixel information (Etapa 5):  </a:t>
             </a:r>
             <a:r>
-              <a:rPr sz="1200">
+              <a:rPr sz="1400">
                 <a:solidFill>
                   <a:srgbClr val="3D424E"/>
                 </a:solidFill>
@@ -16703,7 +16703,7 @@
               </a:spcAft>
             </a:pPr>
             <a:r>
-              <a:rPr sz="1200" b="1">
+              <a:rPr sz="1400" b="1">
                 <a:solidFill>
                   <a:srgbClr val="1F2A4E"/>
                 </a:solidFill>
@@ -16711,7 +16711,7 @@
               <a:t>Ganho esperado se a nossa tese estiver certa:  </a:t>
             </a:r>
             <a:r>
-              <a:rPr sz="1200">
+              <a:rPr sz="1400">
                 <a:solidFill>
                   <a:srgbClr val="3D424E"/>
                 </a:solidFill>
@@ -16817,8 +16817,8 @@
         </p:nvSpPr>
         <p:spPr>
           <a:xfrm>
-            <a:off x="457200" y="320040"/>
-            <a:ext cx="11430000" cy="822960"/>
+            <a:off x="457200" y="274320"/>
+            <a:ext cx="11430000" cy="914400"/>
           </a:xfrm>
           <a:prstGeom prst="rect">
             <a:avLst/>
@@ -16832,7 +16832,7 @@
           <a:lstStyle/>
           <a:p>
             <a:pPr>
-              <a:defRPr sz="2600" b="1">
+              <a:defRPr sz="2800" b="1">
                 <a:solidFill>
                   <a:srgbClr val="1F2A4E"/>
                 </a:solidFill>
